--- a/service/marketing-studio/samples/tips-v1/canva/TIPS_캐러셀_5p.pptx
+++ b/service/marketing-studio/samples/tips-v1/canva/TIPS_캐러셀_5p.pptx
@@ -3172,9 +3172,9 @@
                 <a:solidFill>
                   <a:srgbClr val="2DD4BF"/>
                 </a:solidFill>
-                <a:latin typeface="Pretendard"/>
-                <a:ea typeface="Pretendard"/>
-                <a:cs typeface="Pretendard"/>
+                <a:latin typeface="Noto Sans KR"/>
+                <a:ea typeface="Noto Sans KR"/>
+                <a:cs typeface="Noto Sans KR"/>
               </a:rPr>
               <a:t>비개발 대표를 위한 TIPS 준비 노트</a:t>
             </a:r>
@@ -3189,8 +3189,8 @@
         </p:nvSpPr>
         <p:spPr>
           <a:xfrm>
-            <a:off x="8982224" y="1028700"/>
-            <a:ext cx="532671" cy="276225"/>
+            <a:off x="8747001" y="1028700"/>
+            <a:ext cx="701799" cy="276225"/>
           </a:xfrm>
           <a:prstGeom prst="rect">
             <a:avLst/>
@@ -3203,15 +3203,15 @@
           </a:bodyPr>
           <a:lstStyle/>
           <a:p>
-            <a:pPr algn="l"/>
+            <a:pPr algn="r"/>
             <a:r>
               <a:rPr sz="1800" b="0" spc="-18">
                 <a:solidFill>
                   <a:srgbClr val="FFFFFF"/>
                 </a:solidFill>
-                <a:latin typeface="Pretendard"/>
-                <a:ea typeface="Pretendard"/>
-                <a:cs typeface="Pretendard"/>
+                <a:latin typeface="Noto Sans KR"/>
+                <a:ea typeface="Noto Sans KR"/>
+                <a:cs typeface="Noto Sans KR"/>
               </a:rPr>
               <a:t>1 / 5</a:t>
             </a:r>
@@ -3227,7 +3227,7 @@
         <p:spPr>
           <a:xfrm>
             <a:off x="838200" y="2009775"/>
-            <a:ext cx="5258622" cy="3615035"/>
+            <a:ext cx="6251525" cy="3615035"/>
           </a:xfrm>
           <a:prstGeom prst="rect">
             <a:avLst/>
@@ -3250,9 +3250,9 @@
                 <a:solidFill>
                   <a:srgbClr val="FFFFFF"/>
                 </a:solidFill>
-                <a:latin typeface="Pretendard"/>
-                <a:ea typeface="Pretendard"/>
-                <a:cs typeface="Pretendard"/>
+                <a:latin typeface="Noto Sans KR"/>
+                <a:ea typeface="Noto Sans KR"/>
+                <a:cs typeface="Noto Sans KR"/>
               </a:rPr>
               <a:t>TIPS 준비,</a:t>
             </a:r>
@@ -3268,9 +3268,9 @@
                 <a:solidFill>
                   <a:srgbClr val="FFFFFF"/>
                 </a:solidFill>
-                <a:latin typeface="Pretendard"/>
-                <a:ea typeface="Pretendard"/>
-                <a:cs typeface="Pretendard"/>
+                <a:latin typeface="Noto Sans KR"/>
+                <a:ea typeface="Noto Sans KR"/>
+                <a:cs typeface="Noto Sans KR"/>
               </a:rPr>
               <a:t>어디서부터</a:t>
             </a:r>
@@ -3286,9 +3286,9 @@
                 <a:solidFill>
                   <a:srgbClr val="2DD4BF"/>
                 </a:solidFill>
-                <a:latin typeface="Pretendard"/>
-                <a:ea typeface="Pretendard"/>
-                <a:cs typeface="Pretendard"/>
+                <a:latin typeface="Noto Sans KR"/>
+                <a:ea typeface="Noto Sans KR"/>
+                <a:cs typeface="Noto Sans KR"/>
               </a:rPr>
               <a:t>해야 할까요?</a:t>
             </a:r>
@@ -3304,7 +3304,7 @@
         <p:spPr>
           <a:xfrm>
             <a:off x="838200" y="6036915"/>
-            <a:ext cx="4930801" cy="866775"/>
+            <a:ext cx="5864944" cy="866775"/>
           </a:xfrm>
           <a:prstGeom prst="rect">
             <a:avLst/>
@@ -3327,9 +3327,9 @@
                 <a:solidFill>
                   <a:srgbClr val="BEC2C9"/>
                 </a:solidFill>
-                <a:latin typeface="Pretendard"/>
-                <a:ea typeface="Pretendard"/>
-                <a:cs typeface="Pretendard"/>
+                <a:latin typeface="Noto Sans KR"/>
+                <a:ea typeface="Noto Sans KR"/>
+                <a:cs typeface="Noto Sans KR"/>
               </a:rPr>
               <a:t>사업계획서를 쓰기 전에</a:t>
             </a:r>
@@ -3345,9 +3345,9 @@
                 <a:solidFill>
                   <a:srgbClr val="BEC2C9"/>
                 </a:solidFill>
-                <a:latin typeface="Pretendard"/>
-                <a:ea typeface="Pretendard"/>
-                <a:cs typeface="Pretendard"/>
+                <a:latin typeface="Noto Sans KR"/>
+                <a:ea typeface="Noto Sans KR"/>
+                <a:cs typeface="Noto Sans KR"/>
               </a:rPr>
               <a:t>먼저 세워야 할 두 개의 축이 있습니다.</a:t>
             </a:r>
@@ -3405,7 +3405,7 @@
         <p:spPr>
           <a:xfrm>
             <a:off x="4362450" y="9001125"/>
-            <a:ext cx="979914" cy="381000"/>
+            <a:ext cx="1205880" cy="381000"/>
           </a:xfrm>
           <a:prstGeom prst="rect">
             <a:avLst/>
@@ -3424,9 +3424,9 @@
                 <a:solidFill>
                   <a:srgbClr val="16243D"/>
                 </a:solidFill>
-                <a:latin typeface="Pretendard"/>
-                <a:ea typeface="Pretendard"/>
-                <a:cs typeface="Pretendard"/>
+                <a:latin typeface="Noto Sans KR"/>
+                <a:ea typeface="Noto Sans KR"/>
+                <a:cs typeface="Noto Sans KR"/>
               </a:rPr>
               <a:t>사업 축</a:t>
             </a:r>
@@ -3484,7 +3484,7 @@
         <p:spPr>
           <a:xfrm>
             <a:off x="8369796" y="9001125"/>
-            <a:ext cx="979914" cy="381000"/>
+            <a:ext cx="1205880" cy="381000"/>
           </a:xfrm>
           <a:prstGeom prst="rect">
             <a:avLst/>
@@ -3503,9 +3503,9 @@
                 <a:solidFill>
                   <a:srgbClr val="16243D"/>
                 </a:solidFill>
-                <a:latin typeface="Pretendard"/>
-                <a:ea typeface="Pretendard"/>
-                <a:cs typeface="Pretendard"/>
+                <a:latin typeface="Noto Sans KR"/>
+                <a:ea typeface="Noto Sans KR"/>
+                <a:cs typeface="Noto Sans KR"/>
               </a:rPr>
               <a:t>기술 축</a:t>
             </a:r>
@@ -3584,9 +3584,9 @@
                 <a:solidFill>
                   <a:srgbClr val="FFFFFF"/>
                 </a:solidFill>
-                <a:latin typeface="Pretendard"/>
-                <a:ea typeface="Pretendard"/>
-                <a:cs typeface="Pretendard"/>
+                <a:latin typeface="Noto Sans KR"/>
+                <a:ea typeface="Noto Sans KR"/>
+                <a:cs typeface="Noto Sans KR"/>
               </a:rPr>
               <a:t>R&amp;D 과제</a:t>
             </a:r>
@@ -3649,8 +3649,8 @@
         </p:nvSpPr>
         <p:spPr>
           <a:xfrm>
-            <a:off x="8196560" y="11844338"/>
-            <a:ext cx="1365474" cy="276225"/>
+            <a:off x="7725638" y="11844338"/>
+            <a:ext cx="1723162" cy="276225"/>
           </a:xfrm>
           <a:prstGeom prst="rect">
             <a:avLst/>
@@ -3663,15 +3663,15 @@
           </a:bodyPr>
           <a:lstStyle/>
           <a:p>
-            <a:pPr algn="l"/>
+            <a:pPr algn="r"/>
             <a:r>
               <a:rPr sz="1800" b="1">
                 <a:solidFill>
                   <a:srgbClr val="B9BDC5"/>
                 </a:solidFill>
-                <a:latin typeface="Pretendard"/>
-                <a:ea typeface="Pretendard"/>
-                <a:cs typeface="Pretendard"/>
+                <a:latin typeface="Noto Sans KR"/>
+                <a:ea typeface="Noto Sans KR"/>
+                <a:cs typeface="Noto Sans KR"/>
               </a:rPr>
               <a:t>넘겨보세요 →</a:t>
             </a:r>
@@ -3713,7 +3713,7 @@
         <p:spPr>
           <a:xfrm>
             <a:off x="838200" y="914400"/>
-            <a:ext cx="1247156" cy="295275"/>
+            <a:ext cx="1521023" cy="295275"/>
           </a:xfrm>
           <a:prstGeom prst="rect">
             <a:avLst/>
@@ -3732,9 +3732,9 @@
                 <a:solidFill>
                   <a:srgbClr val="0F9E8C"/>
                 </a:solidFill>
-                <a:latin typeface="Pretendard"/>
-                <a:ea typeface="Pretendard"/>
-                <a:cs typeface="Pretendard"/>
+                <a:latin typeface="Noto Sans KR"/>
+                <a:ea typeface="Noto Sans KR"/>
+                <a:cs typeface="Noto Sans KR"/>
               </a:rPr>
               <a:t>01 · 큰 그림</a:t>
             </a:r>
@@ -3749,8 +3749,8 @@
         </p:nvSpPr>
         <p:spPr>
           <a:xfrm>
-            <a:off x="8982224" y="923925"/>
-            <a:ext cx="532671" cy="276225"/>
+            <a:off x="8747001" y="923925"/>
+            <a:ext cx="701799" cy="276225"/>
           </a:xfrm>
           <a:prstGeom prst="rect">
             <a:avLst/>
@@ -3763,15 +3763,15 @@
           </a:bodyPr>
           <a:lstStyle/>
           <a:p>
-            <a:pPr algn="l"/>
+            <a:pPr algn="r"/>
             <a:r>
               <a:rPr sz="1800" b="0" spc="-18">
                 <a:solidFill>
                   <a:srgbClr val="0F1A2E"/>
                 </a:solidFill>
-                <a:latin typeface="Pretendard"/>
-                <a:ea typeface="Pretendard"/>
-                <a:cs typeface="Pretendard"/>
+                <a:latin typeface="Noto Sans KR"/>
+                <a:ea typeface="Noto Sans KR"/>
+                <a:cs typeface="Noto Sans KR"/>
               </a:rPr>
               <a:t>2 / 5</a:t>
             </a:r>
@@ -3787,7 +3787,7 @@
         <p:spPr>
           <a:xfrm>
             <a:off x="838200" y="1466850"/>
-            <a:ext cx="6735866" cy="2536627"/>
+            <a:ext cx="7993559" cy="2536627"/>
           </a:xfrm>
           <a:prstGeom prst="rect">
             <a:avLst/>
@@ -3810,9 +3810,9 @@
                 <a:solidFill>
                   <a:srgbClr val="0F1A2E"/>
                 </a:solidFill>
-                <a:latin typeface="Pretendard"/>
-                <a:ea typeface="Pretendard"/>
-                <a:cs typeface="Pretendard"/>
+                <a:latin typeface="Noto Sans KR"/>
+                <a:ea typeface="Noto Sans KR"/>
+                <a:cs typeface="Noto Sans KR"/>
               </a:rPr>
               <a:t>R&amp;D 과제는</a:t>
             </a:r>
@@ -3828,9 +3828,9 @@
                 <a:solidFill>
                   <a:srgbClr val="0F1A2E"/>
                 </a:solidFill>
-                <a:latin typeface="Pretendard"/>
-                <a:ea typeface="Pretendard"/>
-                <a:cs typeface="Pretendard"/>
+                <a:latin typeface="Noto Sans KR"/>
+                <a:ea typeface="Noto Sans KR"/>
+                <a:cs typeface="Noto Sans KR"/>
               </a:rPr>
               <a:t>두 축이 만나는 자리에서</a:t>
             </a:r>
@@ -3846,9 +3846,9 @@
                 <a:solidFill>
                   <a:srgbClr val="0F1A2E"/>
                 </a:solidFill>
-                <a:latin typeface="Pretendard"/>
-                <a:ea typeface="Pretendard"/>
-                <a:cs typeface="Pretendard"/>
+                <a:latin typeface="Noto Sans KR"/>
+                <a:ea typeface="Noto Sans KR"/>
+                <a:cs typeface="Noto Sans KR"/>
               </a:rPr>
               <a:t>나옵니다</a:t>
             </a:r>
@@ -3908,7 +3908,7 @@
         <p:spPr>
           <a:xfrm>
             <a:off x="1257300" y="4947940"/>
-            <a:ext cx="722296" cy="276225"/>
+            <a:ext cx="902084" cy="276225"/>
           </a:xfrm>
           <a:prstGeom prst="rect">
             <a:avLst/>
@@ -3927,9 +3927,9 @@
                 <a:solidFill>
                   <a:srgbClr val="FFFFFF"/>
                 </a:solidFill>
-                <a:latin typeface="Pretendard"/>
-                <a:ea typeface="Pretendard"/>
-                <a:cs typeface="Pretendard"/>
+                <a:latin typeface="Noto Sans KR"/>
+                <a:ea typeface="Noto Sans KR"/>
+                <a:cs typeface="Noto Sans KR"/>
               </a:rPr>
               <a:t>사업 축</a:t>
             </a:r>
@@ -3945,7 +3945,7 @@
         <p:spPr>
           <a:xfrm>
             <a:off x="1257300" y="5300365"/>
-            <a:ext cx="3740045" cy="476250"/>
+            <a:ext cx="4460751" cy="476250"/>
           </a:xfrm>
           <a:prstGeom prst="rect">
             <a:avLst/>
@@ -3964,9 +3964,9 @@
                 <a:solidFill>
                   <a:srgbClr val="FFFFFF"/>
                 </a:solidFill>
-                <a:latin typeface="Pretendard"/>
-                <a:ea typeface="Pretendard"/>
-                <a:cs typeface="Pretendard"/>
+                <a:latin typeface="Noto Sans KR"/>
+                <a:ea typeface="Noto Sans KR"/>
+                <a:cs typeface="Noto Sans KR"/>
               </a:rPr>
               <a:t>어디까지 확장 가능한가</a:t>
             </a:r>
@@ -3982,7 +3982,7 @@
         <p:spPr>
           <a:xfrm>
             <a:off x="1257300" y="5919490"/>
-            <a:ext cx="4992957" cy="314325"/>
+            <a:ext cx="5938242" cy="314325"/>
           </a:xfrm>
           <a:prstGeom prst="rect">
             <a:avLst/>
@@ -4001,9 +4001,9 @@
                 <a:solidFill>
                   <a:srgbClr val="FFFFFF"/>
                 </a:solidFill>
-                <a:latin typeface="Pretendard"/>
-                <a:ea typeface="Pretendard"/>
-                <a:cs typeface="Pretendard"/>
+                <a:latin typeface="Noto Sans KR"/>
+                <a:ea typeface="Noto Sans KR"/>
+                <a:cs typeface="Noto Sans KR"/>
               </a:rPr>
               <a:t>“이 기술에 왜 이만큼 투자해야 하나”에 대한 답</a:t>
             </a:r>
@@ -4019,7 +4019,7 @@
         <p:spPr>
           <a:xfrm>
             <a:off x="5005239" y="6692354"/>
-            <a:ext cx="331056" cy="342900"/>
+            <a:ext cx="440717" cy="342900"/>
           </a:xfrm>
           <a:prstGeom prst="rect">
             <a:avLst/>
@@ -4038,9 +4038,9 @@
                 <a:solidFill>
                   <a:srgbClr val="9AAABD"/>
                 </a:solidFill>
-                <a:latin typeface="Pretendard"/>
-                <a:ea typeface="Pretendard"/>
-                <a:cs typeface="Pretendard"/>
+                <a:latin typeface="Noto Sans KR"/>
+                <a:ea typeface="Noto Sans KR"/>
+                <a:cs typeface="Noto Sans KR"/>
               </a:rPr>
               <a:t>▼</a:t>
             </a:r>
@@ -4100,7 +4100,7 @@
         <p:spPr>
           <a:xfrm>
             <a:off x="2885629" y="7616279"/>
-            <a:ext cx="4824788" cy="590550"/>
+            <a:ext cx="5739929" cy="590550"/>
           </a:xfrm>
           <a:prstGeom prst="rect">
             <a:avLst/>
@@ -4119,9 +4119,9 @@
                 <a:solidFill>
                   <a:srgbClr val="16243D"/>
                 </a:solidFill>
-                <a:latin typeface="Pretendard"/>
-                <a:ea typeface="Pretendard"/>
-                <a:cs typeface="Pretendard"/>
+                <a:latin typeface="Noto Sans KR"/>
+                <a:ea typeface="Noto Sans KR"/>
+                <a:cs typeface="Noto Sans KR"/>
               </a:rPr>
               <a:t>우리 회사 코어 기술 엔진</a:t>
             </a:r>
@@ -4137,7 +4137,7 @@
         <p:spPr>
           <a:xfrm>
             <a:off x="3515469" y="8349704"/>
-            <a:ext cx="3489368" cy="314325"/>
+            <a:ext cx="4165141" cy="314325"/>
           </a:xfrm>
           <a:prstGeom prst="rect">
             <a:avLst/>
@@ -4156,9 +4156,9 @@
                 <a:solidFill>
                   <a:srgbClr val="16243D"/>
                 </a:solidFill>
-                <a:latin typeface="Pretendard"/>
-                <a:ea typeface="Pretendard"/>
-                <a:cs typeface="Pretendard"/>
+                <a:latin typeface="Noto Sans KR"/>
+                <a:ea typeface="Noto Sans KR"/>
+                <a:cs typeface="Noto Sans KR"/>
               </a:rPr>
               <a:t>두 축이 만나는 자리 = R&amp;D 과제</a:t>
             </a:r>
@@ -4174,7 +4174,7 @@
         <p:spPr>
           <a:xfrm>
             <a:off x="5005239" y="9198769"/>
-            <a:ext cx="331056" cy="342900"/>
+            <a:ext cx="440717" cy="342900"/>
           </a:xfrm>
           <a:prstGeom prst="rect">
             <a:avLst/>
@@ -4193,9 +4193,9 @@
                 <a:solidFill>
                   <a:srgbClr val="9AAABD"/>
                 </a:solidFill>
-                <a:latin typeface="Pretendard"/>
-                <a:ea typeface="Pretendard"/>
-                <a:cs typeface="Pretendard"/>
+                <a:latin typeface="Noto Sans KR"/>
+                <a:ea typeface="Noto Sans KR"/>
+                <a:cs typeface="Noto Sans KR"/>
               </a:rPr>
               <a:t>▲</a:t>
             </a:r>
@@ -4255,7 +4255,7 @@
         <p:spPr>
           <a:xfrm>
             <a:off x="1257300" y="9970294"/>
-            <a:ext cx="722296" cy="276225"/>
+            <a:ext cx="902084" cy="276225"/>
           </a:xfrm>
           <a:prstGeom prst="rect">
             <a:avLst/>
@@ -4274,9 +4274,9 @@
                 <a:solidFill>
                   <a:srgbClr val="FFFFFF"/>
                 </a:solidFill>
-                <a:latin typeface="Pretendard"/>
-                <a:ea typeface="Pretendard"/>
-                <a:cs typeface="Pretendard"/>
+                <a:latin typeface="Noto Sans KR"/>
+                <a:ea typeface="Noto Sans KR"/>
+                <a:cs typeface="Noto Sans KR"/>
               </a:rPr>
               <a:t>기술 축</a:t>
             </a:r>
@@ -4292,7 +4292,7 @@
         <p:spPr>
           <a:xfrm>
             <a:off x="1257300" y="10322719"/>
-            <a:ext cx="3468386" cy="476250"/>
+            <a:ext cx="4140398" cy="476250"/>
           </a:xfrm>
           <a:prstGeom prst="rect">
             <a:avLst/>
@@ -4311,9 +4311,9 @@
                 <a:solidFill>
                   <a:srgbClr val="FFFFFF"/>
                 </a:solidFill>
-                <a:latin typeface="Pretendard"/>
-                <a:ea typeface="Pretendard"/>
-                <a:cs typeface="Pretendard"/>
+                <a:latin typeface="Noto Sans KR"/>
+                <a:ea typeface="Noto Sans KR"/>
+                <a:cs typeface="Noto Sans KR"/>
               </a:rPr>
               <a:t>이 기술이 왜 필요한가</a:t>
             </a:r>
@@ -4329,7 +4329,7 @@
         <p:spPr>
           <a:xfrm>
             <a:off x="1257300" y="10941844"/>
-            <a:ext cx="5757136" cy="314325"/>
+            <a:ext cx="6839396" cy="314325"/>
           </a:xfrm>
           <a:prstGeom prst="rect">
             <a:avLst/>
@@ -4348,9 +4348,9 @@
                 <a:solidFill>
                   <a:srgbClr val="FFFFFF"/>
                 </a:solidFill>
-                <a:latin typeface="Pretendard"/>
-                <a:ea typeface="Pretendard"/>
-                <a:cs typeface="Pretendard"/>
+                <a:latin typeface="Noto Sans KR"/>
+                <a:ea typeface="Noto Sans KR"/>
+                <a:cs typeface="Noto Sans KR"/>
               </a:rPr>
               <a:t>신사업 나열이 아니라, 같은 기술을 넓혀 적용하는 구조</a:t>
             </a:r>
@@ -4433,8 +4433,8 @@
         </p:nvSpPr>
         <p:spPr>
           <a:xfrm>
-            <a:off x="7886700" y="11849100"/>
-            <a:ext cx="1693926" cy="247650"/>
+            <a:off x="7322820" y="11849100"/>
+            <a:ext cx="2125980" cy="247650"/>
           </a:xfrm>
           <a:prstGeom prst="rect">
             <a:avLst/>
@@ -4447,15 +4447,15 @@
           </a:bodyPr>
           <a:lstStyle/>
           <a:p>
-            <a:pPr algn="l"/>
+            <a:pPr algn="r"/>
             <a:r>
               <a:rPr sz="1650" b="0">
                 <a:solidFill>
                   <a:srgbClr val="0F1A2E"/>
                 </a:solidFill>
-                <a:latin typeface="Pretendard"/>
-                <a:ea typeface="Pretendard"/>
-                <a:cs typeface="Pretendard"/>
+                <a:latin typeface="Noto Sans KR"/>
+                <a:ea typeface="Noto Sans KR"/>
+                <a:cs typeface="Noto Sans KR"/>
               </a:rPr>
               <a:t>사업 축 ↔ 기술 축</a:t>
             </a:r>
@@ -4497,7 +4497,7 @@
         <p:spPr>
           <a:xfrm>
             <a:off x="838200" y="914400"/>
-            <a:ext cx="1284229" cy="295275"/>
+            <a:ext cx="1564742" cy="295275"/>
           </a:xfrm>
           <a:prstGeom prst="rect">
             <a:avLst/>
@@ -4516,9 +4516,9 @@
                 <a:solidFill>
                   <a:srgbClr val="0F9E8C"/>
                 </a:solidFill>
-                <a:latin typeface="Pretendard"/>
-                <a:ea typeface="Pretendard"/>
-                <a:cs typeface="Pretendard"/>
+                <a:latin typeface="Noto Sans KR"/>
+                <a:ea typeface="Noto Sans KR"/>
+                <a:cs typeface="Noto Sans KR"/>
               </a:rPr>
               <a:t>02 · 기술 축</a:t>
             </a:r>
@@ -4533,8 +4533,8 @@
         </p:nvSpPr>
         <p:spPr>
           <a:xfrm>
-            <a:off x="8982224" y="923925"/>
-            <a:ext cx="532671" cy="276225"/>
+            <a:off x="8747001" y="923925"/>
+            <a:ext cx="701799" cy="276225"/>
           </a:xfrm>
           <a:prstGeom prst="rect">
             <a:avLst/>
@@ -4547,15 +4547,15 @@
           </a:bodyPr>
           <a:lstStyle/>
           <a:p>
-            <a:pPr algn="l"/>
+            <a:pPr algn="r"/>
             <a:r>
               <a:rPr sz="1800" b="0" spc="-18">
                 <a:solidFill>
                   <a:srgbClr val="0F1A2E"/>
                 </a:solidFill>
-                <a:latin typeface="Pretendard"/>
-                <a:ea typeface="Pretendard"/>
-                <a:cs typeface="Pretendard"/>
+                <a:latin typeface="Noto Sans KR"/>
+                <a:ea typeface="Noto Sans KR"/>
+                <a:cs typeface="Noto Sans KR"/>
               </a:rPr>
               <a:t>3 / 5</a:t>
             </a:r>
@@ -4571,7 +4571,7 @@
         <p:spPr>
           <a:xfrm>
             <a:off x="838200" y="1457325"/>
-            <a:ext cx="7171751" cy="1655713"/>
+            <a:ext cx="8507574" cy="1655713"/>
           </a:xfrm>
           <a:prstGeom prst="rect">
             <a:avLst/>
@@ -4594,9 +4594,9 @@
                 <a:solidFill>
                   <a:srgbClr val="0F1A2E"/>
                 </a:solidFill>
-                <a:latin typeface="Pretendard"/>
-                <a:ea typeface="Pretendard"/>
-                <a:cs typeface="Pretendard"/>
+                <a:latin typeface="Noto Sans KR"/>
+                <a:ea typeface="Noto Sans KR"/>
+                <a:cs typeface="Noto Sans KR"/>
               </a:rPr>
               <a:t>‘개인화’라고만 쓰면</a:t>
             </a:r>
@@ -4612,9 +4612,9 @@
                 <a:solidFill>
                   <a:srgbClr val="0F1A2E"/>
                 </a:solidFill>
-                <a:latin typeface="Pretendard"/>
-                <a:ea typeface="Pretendard"/>
-                <a:cs typeface="Pretendard"/>
+                <a:latin typeface="Noto Sans KR"/>
+                <a:ea typeface="Noto Sans KR"/>
+                <a:cs typeface="Noto Sans KR"/>
               </a:rPr>
               <a:t>누구나 하는 기술이 됩니다</a:t>
             </a:r>
@@ -4674,7 +4674,7 @@
         <p:spPr>
           <a:xfrm>
             <a:off x="1219200" y="4130576"/>
-            <a:ext cx="375071" cy="457200"/>
+            <a:ext cx="492621" cy="457200"/>
           </a:xfrm>
           <a:prstGeom prst="rect">
             <a:avLst/>
@@ -4693,9 +4693,9 @@
                 <a:solidFill>
                   <a:srgbClr val="0F1A2E"/>
                 </a:solidFill>
-                <a:latin typeface="Pretendard"/>
-                <a:ea typeface="Pretendard"/>
-                <a:cs typeface="Pretendard"/>
+                <a:latin typeface="Noto Sans KR"/>
+                <a:ea typeface="Noto Sans KR"/>
+                <a:cs typeface="Noto Sans KR"/>
               </a:rPr>
               <a:t>왜</a:t>
             </a:r>
@@ -4711,7 +4711,7 @@
         <p:spPr>
           <a:xfrm>
             <a:off x="2647950" y="3968651"/>
-            <a:ext cx="947889" cy="409575"/>
+            <a:ext cx="1168115" cy="409575"/>
           </a:xfrm>
           <a:prstGeom prst="rect">
             <a:avLst/>
@@ -4730,9 +4730,9 @@
                 <a:solidFill>
                   <a:srgbClr val="0F1A2E"/>
                 </a:solidFill>
-                <a:latin typeface="Pretendard"/>
-                <a:ea typeface="Pretendard"/>
-                <a:cs typeface="Pretendard"/>
+                <a:latin typeface="Noto Sans KR"/>
+                <a:ea typeface="Noto Sans KR"/>
+                <a:cs typeface="Noto Sans KR"/>
               </a:rPr>
               <a:t>개인화</a:t>
             </a:r>
@@ -4748,7 +4748,7 @@
         <p:spPr>
           <a:xfrm>
             <a:off x="2647950" y="4454426"/>
-            <a:ext cx="4442383" cy="295275"/>
+            <a:ext cx="5288979" cy="295275"/>
           </a:xfrm>
           <a:prstGeom prst="rect">
             <a:avLst/>
@@ -4767,9 +4767,9 @@
                 <a:solidFill>
                   <a:srgbClr val="6B7A90"/>
                 </a:solidFill>
-                <a:latin typeface="Pretendard"/>
-                <a:ea typeface="Pretendard"/>
-                <a:cs typeface="Pretendard"/>
+                <a:latin typeface="Noto Sans KR"/>
+                <a:ea typeface="Noto Sans KR"/>
+                <a:cs typeface="Noto Sans KR"/>
               </a:rPr>
               <a:t>여기서 멈추면 모두가 같은 목표를 말합니다</a:t>
             </a:r>
@@ -4829,7 +4829,7 @@
         <p:spPr>
           <a:xfrm>
             <a:off x="1219200" y="5730776"/>
-            <a:ext cx="712041" cy="457200"/>
+            <a:ext cx="889992" cy="457200"/>
           </a:xfrm>
           <a:prstGeom prst="rect">
             <a:avLst/>
@@ -4848,9 +4848,9 @@
                 <a:solidFill>
                   <a:srgbClr val="0F1A2E"/>
                 </a:solidFill>
-                <a:latin typeface="Pretendard"/>
-                <a:ea typeface="Pretendard"/>
-                <a:cs typeface="Pretendard"/>
+                <a:latin typeface="Noto Sans KR"/>
+                <a:ea typeface="Noto Sans KR"/>
+                <a:cs typeface="Noto Sans KR"/>
               </a:rPr>
               <a:t>무엇</a:t>
             </a:r>
@@ -4866,7 +4866,7 @@
         <p:spPr>
           <a:xfrm>
             <a:off x="2647950" y="5568851"/>
-            <a:ext cx="2840194" cy="409575"/>
+            <a:ext cx="3399606" cy="409575"/>
           </a:xfrm>
           <a:prstGeom prst="rect">
             <a:avLst/>
@@ -4885,9 +4885,9 @@
                 <a:solidFill>
                   <a:srgbClr val="0F1A2E"/>
                 </a:solidFill>
-                <a:latin typeface="Pretendard"/>
-                <a:ea typeface="Pretendard"/>
-                <a:cs typeface="Pretendard"/>
+                <a:latin typeface="Noto Sans KR"/>
+                <a:ea typeface="Noto Sans KR"/>
+                <a:cs typeface="Noto Sans KR"/>
               </a:rPr>
               <a:t>무엇을 개인화하는가</a:t>
             </a:r>
@@ -4903,7 +4903,7 @@
         <p:spPr>
           <a:xfrm>
             <a:off x="2647950" y="6054626"/>
-            <a:ext cx="3183002" cy="295275"/>
+            <a:ext cx="3803861" cy="295275"/>
           </a:xfrm>
           <a:prstGeom prst="rect">
             <a:avLst/>
@@ -4922,9 +4922,9 @@
                 <a:solidFill>
                   <a:srgbClr val="6B7A90"/>
                 </a:solidFill>
-                <a:latin typeface="Pretendard"/>
-                <a:ea typeface="Pretendard"/>
-                <a:cs typeface="Pretendard"/>
+                <a:latin typeface="Noto Sans KR"/>
+                <a:ea typeface="Noto Sans KR"/>
+                <a:cs typeface="Noto Sans KR"/>
               </a:rPr>
               <a:t>업종마다, 사업마다 달라집니다</a:t>
             </a:r>
@@ -4984,7 +4984,7 @@
         <p:spPr>
           <a:xfrm>
             <a:off x="1219200" y="7330976"/>
-            <a:ext cx="1049012" cy="457200"/>
+            <a:ext cx="1287363" cy="457200"/>
           </a:xfrm>
           <a:prstGeom prst="rect">
             <a:avLst/>
@@ -5003,9 +5003,9 @@
                 <a:solidFill>
                   <a:srgbClr val="16243D"/>
                 </a:solidFill>
-                <a:latin typeface="Pretendard"/>
-                <a:ea typeface="Pretendard"/>
-                <a:cs typeface="Pretendard"/>
+                <a:latin typeface="Noto Sans KR"/>
+                <a:ea typeface="Noto Sans KR"/>
+                <a:cs typeface="Noto Sans KR"/>
               </a:rPr>
               <a:t>어떻게</a:t>
             </a:r>
@@ -5021,7 +5021,7 @@
         <p:spPr>
           <a:xfrm>
             <a:off x="2647950" y="7169051"/>
-            <a:ext cx="2609710" cy="409575"/>
+            <a:ext cx="3127809" cy="409575"/>
           </a:xfrm>
           <a:prstGeom prst="rect">
             <a:avLst/>
@@ -5040,9 +5040,9 @@
                 <a:solidFill>
                   <a:srgbClr val="16243D"/>
                 </a:solidFill>
-                <a:latin typeface="Pretendard"/>
-                <a:ea typeface="Pretendard"/>
-                <a:cs typeface="Pretendard"/>
+                <a:latin typeface="Noto Sans KR"/>
+                <a:ea typeface="Noto Sans KR"/>
+                <a:cs typeface="Noto Sans KR"/>
               </a:rPr>
               <a:t>우리만의 측정 지표</a:t>
             </a:r>
@@ -5121,9 +5121,9 @@
                 <a:solidFill>
                   <a:srgbClr val="FFFFFF"/>
                 </a:solidFill>
-                <a:latin typeface="Pretendard"/>
-                <a:ea typeface="Pretendard"/>
-                <a:cs typeface="Pretendard"/>
+                <a:latin typeface="Noto Sans KR"/>
+                <a:ea typeface="Noto Sans KR"/>
+                <a:cs typeface="Noto Sans KR"/>
               </a:rPr>
               <a:t>★ 과제명</a:t>
             </a:r>
@@ -5139,7 +5139,7 @@
         <p:spPr>
           <a:xfrm>
             <a:off x="2647950" y="7654826"/>
-            <a:ext cx="5328666" cy="295275"/>
+            <a:ext cx="6334125" cy="295275"/>
           </a:xfrm>
           <a:prstGeom prst="rect">
             <a:avLst/>
@@ -5158,9 +5158,9 @@
                 <a:solidFill>
                   <a:srgbClr val="16243D"/>
                 </a:solidFill>
-                <a:latin typeface="Pretendard"/>
-                <a:ea typeface="Pretendard"/>
-                <a:cs typeface="Pretendard"/>
+                <a:latin typeface="Noto Sans KR"/>
+                <a:ea typeface="Noto Sans KR"/>
+                <a:cs typeface="Noto Sans KR"/>
               </a:rPr>
               <a:t>고객·회사·팀에 따라 달라지는, 차별점이 생기는 영역</a:t>
             </a:r>
@@ -5221,7 +5221,7 @@
         <p:spPr>
           <a:xfrm>
             <a:off x="1238250" y="8902601"/>
-            <a:ext cx="2938477" cy="266700"/>
+            <a:ext cx="3515506" cy="266700"/>
           </a:xfrm>
           <a:prstGeom prst="rect">
             <a:avLst/>
@@ -5240,9 +5240,9 @@
                 <a:solidFill>
                   <a:srgbClr val="0F9E8C"/>
                 </a:solidFill>
-                <a:latin typeface="Pretendard"/>
-                <a:ea typeface="Pretendard"/>
-                <a:cs typeface="Pretendard"/>
+                <a:latin typeface="Noto Sans KR"/>
+                <a:ea typeface="Noto Sans KR"/>
+                <a:cs typeface="Noto Sans KR"/>
               </a:rPr>
               <a:t>예시 — 과제 이름이 바뀌는 순간</a:t>
             </a:r>
@@ -5258,7 +5258,7 @@
         <p:spPr>
           <a:xfrm>
             <a:off x="1238250" y="9321701"/>
-            <a:ext cx="5539430" cy="795338"/>
+            <a:ext cx="6582668" cy="795338"/>
           </a:xfrm>
           <a:prstGeom prst="rect">
             <a:avLst/>
@@ -5281,9 +5281,9 @@
                 <a:solidFill>
                   <a:srgbClr val="9AA7B8"/>
                 </a:solidFill>
-                <a:latin typeface="Pretendard"/>
-                <a:ea typeface="Pretendard"/>
-                <a:cs typeface="Pretendard"/>
+                <a:latin typeface="Noto Sans KR"/>
+                <a:ea typeface="Noto Sans KR"/>
+                <a:cs typeface="Noto Sans KR"/>
               </a:rPr>
               <a:t>축구 데이터 분석</a:t>
             </a:r>
@@ -5292,9 +5292,9 @@
                 <a:solidFill>
                   <a:srgbClr val="0F1A2E"/>
                 </a:solidFill>
-                <a:latin typeface="Pretendard"/>
-                <a:ea typeface="Pretendard"/>
-                <a:cs typeface="Pretendard"/>
+                <a:latin typeface="Noto Sans KR"/>
+                <a:ea typeface="Noto Sans KR"/>
+                <a:cs typeface="Noto Sans KR"/>
               </a:rPr>
               <a:t> → </a:t>
             </a:r>
@@ -5303,9 +5303,9 @@
                 <a:solidFill>
                   <a:srgbClr val="0F1A2E"/>
                 </a:solidFill>
-                <a:latin typeface="Pretendard"/>
-                <a:ea typeface="Pretendard"/>
-                <a:cs typeface="Pretendard"/>
+                <a:latin typeface="Noto Sans KR"/>
+                <a:ea typeface="Noto Sans KR"/>
+                <a:cs typeface="Noto Sans KR"/>
               </a:rPr>
               <a:t>센티미터급 위치 측위 측정</a:t>
             </a:r>
@@ -5321,9 +5321,9 @@
                 <a:solidFill>
                   <a:srgbClr val="0F1A2E"/>
                 </a:solidFill>
-                <a:latin typeface="Pretendard"/>
-                <a:ea typeface="Pretendard"/>
-                <a:cs typeface="Pretendard"/>
+                <a:latin typeface="Noto Sans KR"/>
+                <a:ea typeface="Noto Sans KR"/>
+                <a:cs typeface="Noto Sans KR"/>
               </a:rPr>
               <a:t>3번째 질문까지 내려가야 과제명이 됩니다.</a:t>
             </a:r>
@@ -5448,8 +5448,8 @@
         </p:nvSpPr>
         <p:spPr>
           <a:xfrm>
-            <a:off x="7773591" y="11849100"/>
-            <a:ext cx="1813822" cy="247650"/>
+            <a:off x="7175778" y="11849100"/>
+            <a:ext cx="2273022" cy="247650"/>
           </a:xfrm>
           <a:prstGeom prst="rect">
             <a:avLst/>
@@ -5462,15 +5462,15 @@
           </a:bodyPr>
           <a:lstStyle/>
           <a:p>
-            <a:pPr algn="l"/>
+            <a:pPr algn="r"/>
             <a:r>
               <a:rPr sz="1650" b="0">
                 <a:solidFill>
                   <a:srgbClr val="0F1A2E"/>
                 </a:solidFill>
-                <a:latin typeface="Pretendard"/>
-                <a:ea typeface="Pretendard"/>
-                <a:cs typeface="Pretendard"/>
+                <a:latin typeface="Noto Sans KR"/>
+                <a:ea typeface="Noto Sans KR"/>
+                <a:cs typeface="Noto Sans KR"/>
               </a:rPr>
               <a:t>왜 → 무엇 → 어떻게</a:t>
             </a:r>
@@ -5512,7 +5512,7 @@
         <p:spPr>
           <a:xfrm>
             <a:off x="838200" y="914400"/>
-            <a:ext cx="1291644" cy="295275"/>
+            <a:ext cx="1573485" cy="295275"/>
           </a:xfrm>
           <a:prstGeom prst="rect">
             <a:avLst/>
@@ -5531,9 +5531,9 @@
                 <a:solidFill>
                   <a:srgbClr val="2DD4BF"/>
                 </a:solidFill>
-                <a:latin typeface="Pretendard"/>
-                <a:ea typeface="Pretendard"/>
-                <a:cs typeface="Pretendard"/>
+                <a:latin typeface="Noto Sans KR"/>
+                <a:ea typeface="Noto Sans KR"/>
+                <a:cs typeface="Noto Sans KR"/>
               </a:rPr>
               <a:t>03 · 사업 축</a:t>
             </a:r>
@@ -5548,8 +5548,8 @@
         </p:nvSpPr>
         <p:spPr>
           <a:xfrm>
-            <a:off x="8982224" y="923925"/>
-            <a:ext cx="532671" cy="276225"/>
+            <a:off x="8747001" y="923925"/>
+            <a:ext cx="701799" cy="276225"/>
           </a:xfrm>
           <a:prstGeom prst="rect">
             <a:avLst/>
@@ -5562,15 +5562,15 @@
           </a:bodyPr>
           <a:lstStyle/>
           <a:p>
-            <a:pPr algn="l"/>
+            <a:pPr algn="r"/>
             <a:r>
               <a:rPr sz="1800" b="0" spc="-18">
                 <a:solidFill>
                   <a:srgbClr val="FFFFFF"/>
                 </a:solidFill>
-                <a:latin typeface="Pretendard"/>
-                <a:ea typeface="Pretendard"/>
-                <a:cs typeface="Pretendard"/>
+                <a:latin typeface="Noto Sans KR"/>
+                <a:ea typeface="Noto Sans KR"/>
+                <a:cs typeface="Noto Sans KR"/>
               </a:rPr>
               <a:t>4 / 5</a:t>
             </a:r>
@@ -5586,7 +5586,7 @@
         <p:spPr>
           <a:xfrm>
             <a:off x="838200" y="1466850"/>
-            <a:ext cx="6955465" cy="1696938"/>
+            <a:ext cx="8252520" cy="1696938"/>
           </a:xfrm>
           <a:prstGeom prst="rect">
             <a:avLst/>
@@ -5609,9 +5609,9 @@
                 <a:solidFill>
                   <a:srgbClr val="FFFFFF"/>
                 </a:solidFill>
-                <a:latin typeface="Pretendard"/>
-                <a:ea typeface="Pretendard"/>
-                <a:cs typeface="Pretendard"/>
+                <a:latin typeface="Noto Sans KR"/>
+                <a:ea typeface="Noto Sans KR"/>
+                <a:cs typeface="Noto Sans KR"/>
               </a:rPr>
               <a:t>확장 시장은</a:t>
             </a:r>
@@ -5627,9 +5627,9 @@
                 <a:solidFill>
                   <a:srgbClr val="2DD4BF"/>
                 </a:solidFill>
-                <a:latin typeface="Pretendard"/>
-                <a:ea typeface="Pretendard"/>
-                <a:cs typeface="Pretendard"/>
+                <a:latin typeface="Noto Sans KR"/>
+                <a:ea typeface="Noto Sans KR"/>
+                <a:cs typeface="Noto Sans KR"/>
               </a:rPr>
               <a:t>‘지금 지점’</a:t>
             </a:r>
@@ -5638,9 +5638,9 @@
                 <a:solidFill>
                   <a:srgbClr val="FFFFFF"/>
                 </a:solidFill>
-                <a:latin typeface="Pretendard"/>
-                <a:ea typeface="Pretendard"/>
-                <a:cs typeface="Pretendard"/>
+                <a:latin typeface="Noto Sans KR"/>
+                <a:ea typeface="Noto Sans KR"/>
+                <a:cs typeface="Noto Sans KR"/>
               </a:rPr>
               <a:t>부터 찍습니다</a:t>
             </a:r>
@@ -5656,7 +5656,7 @@
         <p:spPr>
           <a:xfrm>
             <a:off x="1210866" y="4022527"/>
-            <a:ext cx="1056584" cy="247650"/>
+            <a:ext cx="1296293" cy="247650"/>
           </a:xfrm>
           <a:prstGeom prst="rect">
             <a:avLst/>
@@ -5675,9 +5675,9 @@
                 <a:solidFill>
                   <a:srgbClr val="A2A7B1"/>
                 </a:solidFill>
-                <a:latin typeface="Pretendard"/>
-                <a:ea typeface="Pretendard"/>
-                <a:cs typeface="Pretendard"/>
+                <a:latin typeface="Noto Sans KR"/>
+                <a:ea typeface="Noto Sans KR"/>
+                <a:cs typeface="Noto Sans KR"/>
               </a:rPr>
               <a:t>시니어·재활</a:t>
             </a:r>
@@ -5825,7 +5825,7 @@
         <p:spPr>
           <a:xfrm>
             <a:off x="1391989" y="5051227"/>
-            <a:ext cx="864593" cy="247650"/>
+            <a:ext cx="1069888" cy="247650"/>
           </a:xfrm>
           <a:prstGeom prst="rect">
             <a:avLst/>
@@ -5844,9 +5844,9 @@
                 <a:solidFill>
                   <a:srgbClr val="A2A7B1"/>
                 </a:solidFill>
-                <a:latin typeface="Pretendard"/>
-                <a:ea typeface="Pretendard"/>
-                <a:cs typeface="Pretendard"/>
+                <a:latin typeface="Noto Sans KR"/>
+                <a:ea typeface="Noto Sans KR"/>
+                <a:cs typeface="Noto Sans KR"/>
               </a:rPr>
               <a:t>복싱·줌바</a:t>
             </a:r>
@@ -5994,7 +5994,7 @@
         <p:spPr>
           <a:xfrm>
             <a:off x="1628329" y="6079927"/>
-            <a:ext cx="614074" cy="247650"/>
+            <a:ext cx="774464" cy="247650"/>
           </a:xfrm>
           <a:prstGeom prst="rect">
             <a:avLst/>
@@ -6013,9 +6013,9 @@
                 <a:solidFill>
                   <a:srgbClr val="A2A7B1"/>
                 </a:solidFill>
-                <a:latin typeface="Pretendard"/>
-                <a:ea typeface="Pretendard"/>
-                <a:cs typeface="Pretendard"/>
+                <a:latin typeface="Noto Sans KR"/>
+                <a:ea typeface="Noto Sans KR"/>
+                <a:cs typeface="Noto Sans KR"/>
               </a:rPr>
               <a:t>태권도</a:t>
             </a:r>
@@ -6094,9 +6094,9 @@
                 <a:solidFill>
                   <a:srgbClr val="16243D"/>
                 </a:solidFill>
-                <a:latin typeface="Pretendard"/>
-                <a:ea typeface="Pretendard"/>
-                <a:cs typeface="Pretendard"/>
+                <a:latin typeface="Noto Sans KR"/>
+                <a:ea typeface="Noto Sans KR"/>
+                <a:cs typeface="Noto Sans KR"/>
               </a:rPr>
               <a:t>지금</a:t>
             </a:r>
@@ -6175,9 +6175,9 @@
                 <a:solidFill>
                   <a:srgbClr val="2DD4BF"/>
                 </a:solidFill>
-                <a:latin typeface="Pretendard"/>
-                <a:ea typeface="Pretendard"/>
-                <a:cs typeface="Pretendard"/>
+                <a:latin typeface="Noto Sans KR"/>
+                <a:ea typeface="Noto Sans KR"/>
+                <a:cs typeface="Noto Sans KR"/>
               </a:rPr>
               <a:t>①</a:t>
             </a:r>
@@ -6256,9 +6256,9 @@
                 <a:solidFill>
                   <a:srgbClr val="2DD4BF"/>
                 </a:solidFill>
-                <a:latin typeface="Pretendard"/>
-                <a:ea typeface="Pretendard"/>
-                <a:cs typeface="Pretendard"/>
+                <a:latin typeface="Noto Sans KR"/>
+                <a:ea typeface="Noto Sans KR"/>
+                <a:cs typeface="Noto Sans KR"/>
               </a:rPr>
               <a:t>②</a:t>
             </a:r>
@@ -6274,7 +6274,7 @@
         <p:spPr>
           <a:xfrm>
             <a:off x="3133130" y="6775252"/>
-            <a:ext cx="860334" cy="247650"/>
+            <a:ext cx="1064865" cy="247650"/>
           </a:xfrm>
           <a:prstGeom prst="rect">
             <a:avLst/>
@@ -6293,9 +6293,9 @@
                 <a:solidFill>
                   <a:srgbClr val="A2A7B1"/>
                 </a:solidFill>
-                <a:latin typeface="Pretendard"/>
-                <a:ea typeface="Pretendard"/>
-                <a:cs typeface="Pretendard"/>
+                <a:latin typeface="Noto Sans KR"/>
+                <a:ea typeface="Noto Sans KR"/>
+                <a:cs typeface="Noto Sans KR"/>
               </a:rPr>
               <a:t>신규 창업</a:t>
             </a:r>
@@ -6311,7 +6311,7 @@
         <p:spPr>
           <a:xfrm>
             <a:off x="5527030" y="6775252"/>
-            <a:ext cx="860334" cy="247650"/>
+            <a:ext cx="1064865" cy="247650"/>
           </a:xfrm>
           <a:prstGeom prst="rect">
             <a:avLst/>
@@ -6330,9 +6330,9 @@
                 <a:solidFill>
                   <a:srgbClr val="A2A7B1"/>
                 </a:solidFill>
-                <a:latin typeface="Pretendard"/>
-                <a:ea typeface="Pretendard"/>
-                <a:cs typeface="Pretendard"/>
+                <a:latin typeface="Noto Sans KR"/>
+                <a:ea typeface="Noto Sans KR"/>
+                <a:cs typeface="Noto Sans KR"/>
               </a:rPr>
               <a:t>공간 전환</a:t>
             </a:r>
@@ -6348,7 +6348,7 @@
         <p:spPr>
           <a:xfrm>
             <a:off x="8037165" y="6775252"/>
-            <a:ext cx="614074" cy="247650"/>
+            <a:ext cx="774464" cy="247650"/>
           </a:xfrm>
           <a:prstGeom prst="rect">
             <a:avLst/>
@@ -6367,9 +6367,9 @@
                 <a:solidFill>
                   <a:srgbClr val="A2A7B1"/>
                 </a:solidFill>
-                <a:latin typeface="Pretendard"/>
-                <a:ea typeface="Pretendard"/>
-                <a:cs typeface="Pretendard"/>
+                <a:latin typeface="Noto Sans KR"/>
+                <a:ea typeface="Noto Sans KR"/>
+                <a:cs typeface="Noto Sans KR"/>
               </a:rPr>
               <a:t>샵인샵</a:t>
             </a:r>
@@ -6384,8 +6384,8 @@
         </p:nvSpPr>
         <p:spPr>
           <a:xfrm>
-            <a:off x="6450211" y="7156252"/>
-            <a:ext cx="3216604" cy="228600"/>
+            <a:off x="5455384" y="7156252"/>
+            <a:ext cx="3993416" cy="228600"/>
           </a:xfrm>
           <a:prstGeom prst="rect">
             <a:avLst/>
@@ -6398,15 +6398,15 @@
           </a:bodyPr>
           <a:lstStyle/>
           <a:p>
-            <a:pPr algn="l"/>
+            <a:pPr algn="r"/>
             <a:r>
               <a:rPr sz="1500" b="0">
                 <a:solidFill>
                   <a:srgbClr val="7F8794"/>
                 </a:solidFill>
-                <a:latin typeface="Pretendard"/>
-                <a:ea typeface="Pretendard"/>
-                <a:cs typeface="Pretendard"/>
+                <a:latin typeface="Noto Sans KR"/>
+                <a:ea typeface="Noto Sans KR"/>
+                <a:cs typeface="Noto Sans KR"/>
               </a:rPr>
               <a:t>예시 · x축 도입 공간 / y축 종목·프로그램</a:t>
             </a:r>
@@ -6483,9 +6483,9 @@
                 <a:solidFill>
                   <a:srgbClr val="16243D"/>
                 </a:solidFill>
-                <a:latin typeface="Pretendard"/>
-                <a:ea typeface="Pretendard"/>
-                <a:cs typeface="Pretendard"/>
+                <a:latin typeface="Noto Sans KR"/>
+                <a:ea typeface="Noto Sans KR"/>
+                <a:cs typeface="Noto Sans KR"/>
               </a:rPr>
               <a:t>1</a:t>
             </a:r>
@@ -6501,7 +6501,7 @@
         <p:spPr>
           <a:xfrm>
             <a:off x="1562100" y="7803952"/>
-            <a:ext cx="4036472" cy="381000"/>
+            <a:ext cx="4810311" cy="381000"/>
           </a:xfrm>
           <a:prstGeom prst="rect">
             <a:avLst/>
@@ -6520,9 +6520,9 @@
                 <a:solidFill>
                   <a:srgbClr val="FFFFFF"/>
                 </a:solidFill>
-                <a:latin typeface="Pretendard"/>
-                <a:ea typeface="Pretendard"/>
-                <a:cs typeface="Pretendard"/>
+                <a:latin typeface="Noto Sans KR"/>
+                <a:ea typeface="Noto Sans KR"/>
+                <a:cs typeface="Noto Sans KR"/>
               </a:rPr>
               <a:t>지금 있는 지점을 하나로 찍는다</a:t>
             </a:r>
@@ -6538,7 +6538,7 @@
         <p:spPr>
           <a:xfrm>
             <a:off x="1562100" y="8242102"/>
-            <a:ext cx="3179058" cy="285750"/>
+            <a:ext cx="3799210" cy="285750"/>
           </a:xfrm>
           <a:prstGeom prst="rect">
             <a:avLst/>
@@ -6557,9 +6557,9 @@
                 <a:solidFill>
                   <a:srgbClr val="B0B5BD"/>
                 </a:solidFill>
-                <a:latin typeface="Pretendard"/>
-                <a:ea typeface="Pretendard"/>
-                <a:cs typeface="Pretendard"/>
+                <a:latin typeface="Noto Sans KR"/>
+                <a:ea typeface="Noto Sans KR"/>
+                <a:cs typeface="Noto Sans KR"/>
               </a:rPr>
               <a:t>“우리는 A시장의 B단계에 있다”</a:t>
             </a:r>
@@ -6636,9 +6636,9 @@
                 <a:solidFill>
                   <a:srgbClr val="16243D"/>
                 </a:solidFill>
-                <a:latin typeface="Pretendard"/>
-                <a:ea typeface="Pretendard"/>
-                <a:cs typeface="Pretendard"/>
+                <a:latin typeface="Noto Sans KR"/>
+                <a:ea typeface="Noto Sans KR"/>
+                <a:cs typeface="Noto Sans KR"/>
               </a:rPr>
               <a:t>2</a:t>
             </a:r>
@@ -6654,7 +6654,7 @@
         <p:spPr>
           <a:xfrm>
             <a:off x="1562100" y="8775502"/>
-            <a:ext cx="4322802" cy="381000"/>
+            <a:ext cx="5147965" cy="381000"/>
           </a:xfrm>
           <a:prstGeom prst="rect">
             <a:avLst/>
@@ -6673,9 +6673,9 @@
                 <a:solidFill>
                   <a:srgbClr val="FFFFFF"/>
                 </a:solidFill>
-                <a:latin typeface="Pretendard"/>
-                <a:ea typeface="Pretendard"/>
-                <a:cs typeface="Pretendard"/>
+                <a:latin typeface="Noto Sans KR"/>
+                <a:ea typeface="Noto Sans KR"/>
+                <a:cs typeface="Noto Sans KR"/>
               </a:rPr>
               <a:t>다음 지점으로 가는 이유를 붙인다</a:t>
             </a:r>
@@ -6691,7 +6691,7 @@
         <p:spPr>
           <a:xfrm>
             <a:off x="1562100" y="9213652"/>
-            <a:ext cx="3110433" cy="285750"/>
+            <a:ext cx="3718285" cy="285750"/>
           </a:xfrm>
           <a:prstGeom prst="rect">
             <a:avLst/>
@@ -6710,9 +6710,9 @@
                 <a:solidFill>
                   <a:srgbClr val="B0B5BD"/>
                 </a:solidFill>
-                <a:latin typeface="Pretendard"/>
-                <a:ea typeface="Pretendard"/>
-                <a:cs typeface="Pretendard"/>
+                <a:latin typeface="Noto Sans KR"/>
+                <a:ea typeface="Noto Sans KR"/>
+                <a:cs typeface="Noto Sans KR"/>
               </a:rPr>
               <a:t>핵심은 </a:t>
             </a:r>
@@ -6721,9 +6721,9 @@
                 <a:solidFill>
                   <a:srgbClr val="2DD4BF"/>
                 </a:solidFill>
-                <a:latin typeface="Pretendard"/>
-                <a:ea typeface="Pretendard"/>
-                <a:cs typeface="Pretendard"/>
+                <a:latin typeface="Noto Sans KR"/>
+                <a:ea typeface="Noto Sans KR"/>
+                <a:cs typeface="Noto Sans KR"/>
               </a:rPr>
               <a:t>같은 기술의 고도화 적용</a:t>
             </a:r>
@@ -6800,9 +6800,9 @@
                 <a:solidFill>
                   <a:srgbClr val="16243D"/>
                 </a:solidFill>
-                <a:latin typeface="Pretendard"/>
-                <a:ea typeface="Pretendard"/>
-                <a:cs typeface="Pretendard"/>
+                <a:latin typeface="Noto Sans KR"/>
+                <a:ea typeface="Noto Sans KR"/>
+                <a:cs typeface="Noto Sans KR"/>
               </a:rPr>
               <a:t>3</a:t>
             </a:r>
@@ -6818,7 +6818,7 @@
         <p:spPr>
           <a:xfrm>
             <a:off x="1562100" y="9747052"/>
-            <a:ext cx="3681201" cy="381000"/>
+            <a:ext cx="4391360" cy="381000"/>
           </a:xfrm>
           <a:prstGeom prst="rect">
             <a:avLst/>
@@ -6837,9 +6837,9 @@
                 <a:solidFill>
                   <a:srgbClr val="FFFFFF"/>
                 </a:solidFill>
-                <a:latin typeface="Pretendard"/>
-                <a:ea typeface="Pretendard"/>
-                <a:cs typeface="Pretendard"/>
+                <a:latin typeface="Noto Sans KR"/>
+                <a:ea typeface="Noto Sans KR"/>
+                <a:cs typeface="Noto Sans KR"/>
               </a:rPr>
               <a:t>칸마다 시점과 숫자를 붙인다</a:t>
             </a:r>
@@ -6855,7 +6855,7 @@
         <p:spPr>
           <a:xfrm>
             <a:off x="1562100" y="10185202"/>
-            <a:ext cx="4143274" cy="285750"/>
+            <a:ext cx="4936257" cy="285750"/>
           </a:xfrm>
           <a:prstGeom prst="rect">
             <a:avLst/>
@@ -6874,9 +6874,9 @@
                 <a:solidFill>
                   <a:srgbClr val="B0B5BD"/>
                 </a:solidFill>
-                <a:latin typeface="Pretendard"/>
-                <a:ea typeface="Pretendard"/>
-                <a:cs typeface="Pretendard"/>
+                <a:latin typeface="Noto Sans KR"/>
+                <a:ea typeface="Noto Sans KR"/>
+                <a:cs typeface="Noto Sans KR"/>
               </a:rPr>
               <a:t>그대로 2년짜리 스케일업 스토리가 됩니다</a:t>
             </a:r>
@@ -6939,8 +6939,8 @@
         </p:nvSpPr>
         <p:spPr>
           <a:xfrm>
-            <a:off x="8339882" y="11872912"/>
-            <a:ext cx="1213553" cy="276225"/>
+            <a:off x="7911956" y="11872912"/>
+            <a:ext cx="1536844" cy="276225"/>
           </a:xfrm>
           <a:prstGeom prst="rect">
             <a:avLst/>
@@ -6953,15 +6953,15 @@
           </a:bodyPr>
           <a:lstStyle/>
           <a:p>
-            <a:pPr algn="l"/>
+            <a:pPr algn="r"/>
             <a:r>
               <a:rPr sz="1800" b="1">
                 <a:solidFill>
                   <a:srgbClr val="B9BDC5"/>
                 </a:solidFill>
-                <a:latin typeface="Pretendard"/>
-                <a:ea typeface="Pretendard"/>
-                <a:cs typeface="Pretendard"/>
+                <a:latin typeface="Noto Sans KR"/>
+                <a:ea typeface="Noto Sans KR"/>
+                <a:cs typeface="Noto Sans KR"/>
               </a:rPr>
               <a:t>마지막 장 →</a:t>
             </a:r>
@@ -7003,7 +7003,7 @@
         <p:spPr>
           <a:xfrm>
             <a:off x="838200" y="914400"/>
-            <a:ext cx="1238795" cy="295275"/>
+            <a:ext cx="1511164" cy="295275"/>
           </a:xfrm>
           <a:prstGeom prst="rect">
             <a:avLst/>
@@ -7022,9 +7022,9 @@
                 <a:solidFill>
                   <a:srgbClr val="0F9E8C"/>
                 </a:solidFill>
-                <a:latin typeface="Pretendard"/>
-                <a:ea typeface="Pretendard"/>
-                <a:cs typeface="Pretendard"/>
+                <a:latin typeface="Noto Sans KR"/>
+                <a:ea typeface="Noto Sans KR"/>
+                <a:cs typeface="Noto Sans KR"/>
               </a:rPr>
               <a:t>04 · 시작점</a:t>
             </a:r>
@@ -7039,8 +7039,8 @@
         </p:nvSpPr>
         <p:spPr>
           <a:xfrm>
-            <a:off x="8982224" y="923925"/>
-            <a:ext cx="532671" cy="276225"/>
+            <a:off x="8747001" y="923925"/>
+            <a:ext cx="701799" cy="276225"/>
           </a:xfrm>
           <a:prstGeom prst="rect">
             <a:avLst/>
@@ -7053,15 +7053,15 @@
           </a:bodyPr>
           <a:lstStyle/>
           <a:p>
-            <a:pPr algn="l"/>
+            <a:pPr algn="r"/>
             <a:r>
               <a:rPr sz="1800" b="0" spc="-18">
                 <a:solidFill>
                   <a:srgbClr val="0F1A2E"/>
                 </a:solidFill>
-                <a:latin typeface="Pretendard"/>
-                <a:ea typeface="Pretendard"/>
-                <a:cs typeface="Pretendard"/>
+                <a:latin typeface="Noto Sans KR"/>
+                <a:ea typeface="Noto Sans KR"/>
+                <a:cs typeface="Noto Sans KR"/>
               </a:rPr>
               <a:t>5 / 5</a:t>
             </a:r>
@@ -7077,7 +7077,7 @@
         <p:spPr>
           <a:xfrm>
             <a:off x="838200" y="1457325"/>
-            <a:ext cx="8306345" cy="1573411"/>
+            <a:ext cx="9448800" cy="1573411"/>
           </a:xfrm>
           <a:prstGeom prst="rect">
             <a:avLst/>
@@ -7100,9 +7100,9 @@
                 <a:solidFill>
                   <a:srgbClr val="0F1A2E"/>
                 </a:solidFill>
-                <a:latin typeface="Pretendard"/>
-                <a:ea typeface="Pretendard"/>
-                <a:cs typeface="Pretendard"/>
+                <a:latin typeface="Noto Sans KR"/>
+                <a:ea typeface="Noto Sans KR"/>
+                <a:cs typeface="Noto Sans KR"/>
               </a:rPr>
               <a:t>순서는 알겠는데,</a:t>
             </a:r>
@@ -7118,9 +7118,9 @@
                 <a:solidFill>
                   <a:srgbClr val="0F1A2E"/>
                 </a:solidFill>
-                <a:latin typeface="Pretendard"/>
-                <a:ea typeface="Pretendard"/>
-                <a:cs typeface="Pretendard"/>
+                <a:latin typeface="Noto Sans KR"/>
+                <a:ea typeface="Noto Sans KR"/>
+                <a:cs typeface="Noto Sans KR"/>
               </a:rPr>
               <a:t>우리 회사는 지금 어디쯤일까요?</a:t>
             </a:r>
@@ -7332,7 +7332,7 @@
         <p:spPr>
           <a:xfrm>
             <a:off x="838200" y="8747968"/>
-            <a:ext cx="3635767" cy="238125"/>
+            <a:ext cx="4337782" cy="238125"/>
           </a:xfrm>
           <a:prstGeom prst="rect">
             <a:avLst/>
@@ -7351,9 +7351,9 @@
                 <a:solidFill>
                   <a:srgbClr val="8C8577"/>
                 </a:solidFill>
-                <a:latin typeface="Pretendard"/>
-                <a:ea typeface="Pretendard"/>
-                <a:cs typeface="Pretendard"/>
+                <a:latin typeface="Noto Sans KR"/>
+                <a:ea typeface="Noto Sans KR"/>
+                <a:cs typeface="Noto Sans KR"/>
               </a:rPr>
               <a:t>코파운더 결정지도 — 실제 화면 (자사 사례)</a:t>
             </a:r>
@@ -7369,7 +7369,7 @@
         <p:spPr>
           <a:xfrm>
             <a:off x="838200" y="9348043"/>
-            <a:ext cx="6320016" cy="761405"/>
+            <a:ext cx="7503170" cy="761405"/>
           </a:xfrm>
           <a:prstGeom prst="rect">
             <a:avLst/>
@@ -7392,9 +7392,9 @@
                 <a:solidFill>
                   <a:srgbClr val="2B3446"/>
                 </a:solidFill>
-                <a:latin typeface="Pretendard"/>
-                <a:ea typeface="Pretendard"/>
-                <a:cs typeface="Pretendard"/>
+                <a:latin typeface="Noto Sans KR"/>
+                <a:ea typeface="Noto Sans KR"/>
+                <a:cs typeface="Noto Sans KR"/>
               </a:rPr>
               <a:t>이익을 이루는 숫자를 결정 단위로 쪼개고,</a:t>
             </a:r>
@@ -7410,9 +7410,9 @@
                 <a:solidFill>
                   <a:srgbClr val="2B3446"/>
                 </a:solidFill>
-                <a:latin typeface="Pretendard"/>
-                <a:ea typeface="Pretendard"/>
-                <a:cs typeface="Pretendard"/>
+                <a:latin typeface="Noto Sans KR"/>
+                <a:ea typeface="Noto Sans KR"/>
+                <a:cs typeface="Noto Sans KR"/>
               </a:rPr>
               <a:t>지금 재고 있는 곳과 비어 있는 곳을 지도로 보여드립니다.</a:t>
             </a:r>
@@ -7472,7 +7472,7 @@
         <p:spPr>
           <a:xfrm>
             <a:off x="1219200" y="10932765"/>
-            <a:ext cx="4464469" cy="409575"/>
+            <a:ext cx="5315024" cy="409575"/>
           </a:xfrm>
           <a:prstGeom prst="rect">
             <a:avLst/>
@@ -7491,9 +7491,9 @@
                 <a:solidFill>
                   <a:srgbClr val="FFFFFF"/>
                 </a:solidFill>
-                <a:latin typeface="Pretendard"/>
-                <a:ea typeface="Pretendard"/>
-                <a:cs typeface="Pretendard"/>
+                <a:latin typeface="Noto Sans KR"/>
+                <a:ea typeface="Noto Sans KR"/>
+                <a:cs typeface="Noto Sans KR"/>
               </a:rPr>
               <a:t>우리 회사 AX 수준 진단받아보기</a:t>
             </a:r>
@@ -7570,9 +7570,9 @@
                 <a:solidFill>
                   <a:srgbClr val="16243D"/>
                 </a:solidFill>
-                <a:latin typeface="Pretendard"/>
-                <a:ea typeface="Pretendard"/>
-                <a:cs typeface="Pretendard"/>
+                <a:latin typeface="Noto Sans KR"/>
+                <a:ea typeface="Noto Sans KR"/>
+                <a:cs typeface="Noto Sans KR"/>
               </a:rPr>
               <a:t>→</a:t>
             </a:r>
@@ -7588,7 +7588,7 @@
         <p:spPr>
           <a:xfrm>
             <a:off x="838200" y="11899553"/>
-            <a:ext cx="6116666" cy="219075"/>
+            <a:ext cx="7263371" cy="219075"/>
           </a:xfrm>
           <a:prstGeom prst="rect">
             <a:avLst/>
@@ -7607,9 +7607,9 @@
                 <a:solidFill>
                   <a:srgbClr val="9B9486"/>
                 </a:solidFill>
-                <a:latin typeface="Pretendard"/>
-                <a:ea typeface="Pretendard"/>
-                <a:cs typeface="Pretendard"/>
+                <a:latin typeface="Noto Sans KR"/>
+                <a:ea typeface="Noto Sans KR"/>
+                <a:cs typeface="Noto Sans KR"/>
               </a:rPr>
               <a:t>프로필 링크 또는 DM으로 문의 · TIPS 선정은 운영사·전담기관 심사로 결정됩니다</a:t>
             </a:r>

--- a/service/marketing-studio/samples/tips-v1/canva/TIPS_캐러셀_5p.pptx
+++ b/service/marketing-studio/samples/tips-v1/canva/TIPS_캐러셀_5p.pptx
@@ -3109,7 +3109,7 @@
         <p:spPr>
           <a:xfrm>
             <a:off x="838200" y="914400"/>
-            <a:ext cx="3500140" cy="504825"/>
+            <a:ext cx="3724424" cy="502890"/>
           </a:xfrm>
           <a:prstGeom prst="roundRect">
             <a:avLst>
@@ -3153,7 +3153,7 @@
         <p:spPr>
           <a:xfrm>
             <a:off x="838200" y="914400"/>
-            <a:ext cx="3500140" cy="504825"/>
+            <a:ext cx="3724424" cy="502890"/>
           </a:xfrm>
           <a:prstGeom prst="rect">
             <a:avLst/>
@@ -3166,7 +3166,11 @@
           </a:bodyPr>
           <a:lstStyle/>
           <a:p>
-            <a:pPr algn="ctr"/>
+            <a:pPr algn="ctr">
+              <a:lnSpc>
+                <a:spcPts val="2160"/>
+              </a:lnSpc>
+            </a:pPr>
             <a:r>
               <a:rPr sz="1800" b="1" spc="-18">
                 <a:solidFill>
@@ -3189,8 +3193,8 @@
         </p:nvSpPr>
         <p:spPr>
           <a:xfrm>
-            <a:off x="8747001" y="1028700"/>
-            <a:ext cx="701799" cy="276225"/>
+            <a:off x="8755320" y="1020128"/>
+            <a:ext cx="693480" cy="274320"/>
           </a:xfrm>
           <a:prstGeom prst="rect">
             <a:avLst/>
@@ -3203,7 +3207,11 @@
           </a:bodyPr>
           <a:lstStyle/>
           <a:p>
-            <a:pPr algn="r"/>
+            <a:pPr algn="r">
+              <a:lnSpc>
+                <a:spcPts val="2160"/>
+              </a:lnSpc>
+            </a:pPr>
             <a:r>
               <a:rPr sz="1800" b="0" spc="-18">
                 <a:solidFill>
@@ -3226,8 +3234,8 @@
         </p:nvSpPr>
         <p:spPr>
           <a:xfrm>
-            <a:off x="838200" y="2009775"/>
-            <a:ext cx="6251525" cy="3615035"/>
+            <a:off x="838200" y="2020794"/>
+            <a:ext cx="6627502" cy="3579602"/>
           </a:xfrm>
           <a:prstGeom prst="rect">
             <a:avLst/>
@@ -3303,8 +3311,8 @@
         </p:nvSpPr>
         <p:spPr>
           <a:xfrm>
-            <a:off x="838200" y="6036915"/>
-            <a:ext cx="5864944" cy="866775"/>
+            <a:off x="838200" y="5987355"/>
+            <a:ext cx="6296732" cy="971550"/>
           </a:xfrm>
           <a:prstGeom prst="rect">
             <a:avLst/>
@@ -3404,8 +3412,8 @@
         </p:nvSpPr>
         <p:spPr>
           <a:xfrm>
-            <a:off x="4362450" y="9001125"/>
-            <a:ext cx="1205880" cy="381000"/>
+            <a:off x="4362450" y="8988683"/>
+            <a:ext cx="1293502" cy="388620"/>
           </a:xfrm>
           <a:prstGeom prst="rect">
             <a:avLst/>
@@ -3418,7 +3426,11 @@
           </a:bodyPr>
           <a:lstStyle/>
           <a:p>
-            <a:pPr algn="l"/>
+            <a:pPr algn="l">
+              <a:lnSpc>
+                <a:spcPts val="3060"/>
+              </a:lnSpc>
+            </a:pPr>
             <a:r>
               <a:rPr sz="2550" b="1" spc="-51">
                 <a:solidFill>
@@ -3483,8 +3495,8 @@
         </p:nvSpPr>
         <p:spPr>
           <a:xfrm>
-            <a:off x="8369796" y="9001125"/>
-            <a:ext cx="1205880" cy="381000"/>
+            <a:off x="8299698" y="8988683"/>
+            <a:ext cx="1293502" cy="388620"/>
           </a:xfrm>
           <a:prstGeom prst="rect">
             <a:avLst/>
@@ -3497,7 +3509,11 @@
           </a:bodyPr>
           <a:lstStyle/>
           <a:p>
-            <a:pPr algn="l"/>
+            <a:pPr algn="l">
+              <a:lnSpc>
+                <a:spcPts val="3060"/>
+              </a:lnSpc>
+            </a:pPr>
             <a:r>
               <a:rPr sz="2550" b="1" spc="-51">
                 <a:solidFill>
@@ -3520,12 +3536,12 @@
         </p:nvSpPr>
         <p:spPr>
           <a:xfrm>
-            <a:off x="6417022" y="8958262"/>
-            <a:ext cx="1167557" cy="466725"/>
+            <a:off x="6381006" y="8959155"/>
+            <a:ext cx="1239738" cy="464790"/>
           </a:xfrm>
           <a:prstGeom prst="roundRect">
             <a:avLst>
-              <a:gd name="adj" fmla="val 20408"/>
+              <a:gd name="adj" fmla="val 20493"/>
             </a:avLst>
           </a:prstGeom>
           <a:solidFill>
@@ -3564,8 +3580,8 @@
         </p:nvSpPr>
         <p:spPr>
           <a:xfrm>
-            <a:off x="6417022" y="8958262"/>
-            <a:ext cx="1167557" cy="466725"/>
+            <a:off x="6381006" y="8959155"/>
+            <a:ext cx="1239738" cy="464790"/>
           </a:xfrm>
           <a:prstGeom prst="rect">
             <a:avLst/>
@@ -3578,7 +3594,11 @@
           </a:bodyPr>
           <a:lstStyle/>
           <a:p>
-            <a:pPr algn="ctr"/>
+            <a:pPr algn="ctr">
+              <a:lnSpc>
+                <a:spcPts val="2160"/>
+              </a:lnSpc>
+            </a:pPr>
             <a:r>
               <a:rPr sz="1800" b="1">
                 <a:solidFill>
@@ -3649,8 +3669,8 @@
         </p:nvSpPr>
         <p:spPr>
           <a:xfrm>
-            <a:off x="7725638" y="11844338"/>
-            <a:ext cx="1723162" cy="276225"/>
+            <a:off x="7606070" y="11836658"/>
+            <a:ext cx="1842730" cy="274320"/>
           </a:xfrm>
           <a:prstGeom prst="rect">
             <a:avLst/>
@@ -3663,7 +3683,11 @@
           </a:bodyPr>
           <a:lstStyle/>
           <a:p>
-            <a:pPr algn="r"/>
+            <a:pPr algn="r">
+              <a:lnSpc>
+                <a:spcPts val="2160"/>
+              </a:lnSpc>
+            </a:pPr>
             <a:r>
               <a:rPr sz="1800" b="1">
                 <a:solidFill>
@@ -3712,8 +3736,8 @@
         </p:nvSpPr>
         <p:spPr>
           <a:xfrm>
-            <a:off x="838200" y="914400"/>
-            <a:ext cx="1521023" cy="295275"/>
+            <a:off x="838200" y="913448"/>
+            <a:ext cx="1648085" cy="297180"/>
           </a:xfrm>
           <a:prstGeom prst="rect">
             <a:avLst/>
@@ -3726,7 +3750,11 @@
           </a:bodyPr>
           <a:lstStyle/>
           <a:p>
-            <a:pPr algn="l"/>
+            <a:pPr algn="l">
+              <a:lnSpc>
+                <a:spcPts val="2340"/>
+              </a:lnSpc>
+            </a:pPr>
             <a:r>
               <a:rPr sz="1950" b="1" spc="-20">
                 <a:solidFill>
@@ -3749,8 +3777,8 @@
         </p:nvSpPr>
         <p:spPr>
           <a:xfrm>
-            <a:off x="8747001" y="923925"/>
-            <a:ext cx="701799" cy="276225"/>
+            <a:off x="8755320" y="917138"/>
+            <a:ext cx="693480" cy="274320"/>
           </a:xfrm>
           <a:prstGeom prst="rect">
             <a:avLst/>
@@ -3763,7 +3791,11 @@
           </a:bodyPr>
           <a:lstStyle/>
           <a:p>
-            <a:pPr algn="r"/>
+            <a:pPr algn="r">
+              <a:lnSpc>
+                <a:spcPts val="2160"/>
+              </a:lnSpc>
+            </a:pPr>
             <a:r>
               <a:rPr sz="1800" b="0" spc="-18">
                 <a:solidFill>
@@ -3786,8 +3818,8 @@
         </p:nvSpPr>
         <p:spPr>
           <a:xfrm>
-            <a:off x="838200" y="1466850"/>
-            <a:ext cx="7993559" cy="2536627"/>
+            <a:off x="838200" y="1477399"/>
+            <a:ext cx="8651007" cy="2519101"/>
           </a:xfrm>
           <a:prstGeom prst="rect">
             <a:avLst/>
@@ -3863,12 +3895,12 @@
         </p:nvSpPr>
         <p:spPr>
           <a:xfrm>
-            <a:off x="838200" y="4605040"/>
-            <a:ext cx="8610600" cy="2001589"/>
+            <a:off x="838200" y="4606826"/>
+            <a:ext cx="8610600" cy="2003375"/>
           </a:xfrm>
           <a:prstGeom prst="roundRect">
             <a:avLst>
-              <a:gd name="adj" fmla="val 11420"/>
+              <a:gd name="adj" fmla="val 11410"/>
             </a:avLst>
           </a:prstGeom>
           <a:solidFill>
@@ -3907,8 +3939,8 @@
         </p:nvSpPr>
         <p:spPr>
           <a:xfrm>
-            <a:off x="1257300" y="4947940"/>
-            <a:ext cx="902084" cy="276225"/>
+            <a:off x="1257300" y="4941153"/>
+            <a:ext cx="964034" cy="274320"/>
           </a:xfrm>
           <a:prstGeom prst="rect">
             <a:avLst/>
@@ -3921,7 +3953,11 @@
           </a:bodyPr>
           <a:lstStyle/>
           <a:p>
-            <a:pPr algn="l"/>
+            <a:pPr algn="l">
+              <a:lnSpc>
+                <a:spcPts val="2160"/>
+              </a:lnSpc>
+            </a:pPr>
             <a:r>
               <a:rPr sz="1800" b="1">
                 <a:solidFill>
@@ -3944,8 +3980,8 @@
         </p:nvSpPr>
         <p:spPr>
           <a:xfrm>
-            <a:off x="1257300" y="5300365"/>
-            <a:ext cx="4460751" cy="476250"/>
+            <a:off x="1257300" y="5293549"/>
+            <a:ext cx="4795986" cy="480060"/>
           </a:xfrm>
           <a:prstGeom prst="rect">
             <a:avLst/>
@@ -3958,7 +3994,11 @@
           </a:bodyPr>
           <a:lstStyle/>
           <a:p>
-            <a:pPr algn="l"/>
+            <a:pPr algn="l">
+              <a:lnSpc>
+                <a:spcPts val="3779"/>
+              </a:lnSpc>
+            </a:pPr>
             <a:r>
               <a:rPr sz="3150" b="1" spc="-94">
                 <a:solidFill>
@@ -3981,8 +4021,8 @@
         </p:nvSpPr>
         <p:spPr>
           <a:xfrm>
-            <a:off x="1257300" y="5919490"/>
-            <a:ext cx="5938242" cy="314325"/>
+            <a:off x="1257300" y="5893772"/>
+            <a:ext cx="6354403" cy="372904"/>
           </a:xfrm>
           <a:prstGeom prst="rect">
             <a:avLst/>
@@ -3995,7 +4035,11 @@
           </a:bodyPr>
           <a:lstStyle/>
           <a:p>
-            <a:pPr algn="l"/>
+            <a:pPr algn="l">
+              <a:lnSpc>
+                <a:spcPts val="2936"/>
+              </a:lnSpc>
+            </a:pPr>
             <a:r>
               <a:rPr sz="2025" b="0">
                 <a:solidFill>
@@ -4018,8 +4062,8 @@
         </p:nvSpPr>
         <p:spPr>
           <a:xfrm>
-            <a:off x="5005239" y="6692354"/>
-            <a:ext cx="440717" cy="342900"/>
+            <a:off x="5000625" y="6695926"/>
+            <a:ext cx="452438" cy="342900"/>
           </a:xfrm>
           <a:prstGeom prst="rect">
             <a:avLst/>
@@ -4032,7 +4076,11 @@
           </a:bodyPr>
           <a:lstStyle/>
           <a:p>
-            <a:pPr algn="l"/>
+            <a:pPr algn="l">
+              <a:lnSpc>
+                <a:spcPts val="2700"/>
+              </a:lnSpc>
+            </a:pPr>
             <a:r>
               <a:rPr sz="2250" b="0">
                 <a:solidFill>
@@ -4055,12 +4103,12 @@
         </p:nvSpPr>
         <p:spPr>
           <a:xfrm>
-            <a:off x="838200" y="7120979"/>
-            <a:ext cx="8610600" cy="1992064"/>
+            <a:off x="838200" y="7124551"/>
+            <a:ext cx="8610600" cy="1995785"/>
           </a:xfrm>
           <a:prstGeom prst="roundRect">
             <a:avLst>
-              <a:gd name="adj" fmla="val 11475"/>
+              <a:gd name="adj" fmla="val 11454"/>
             </a:avLst>
           </a:prstGeom>
           <a:solidFill>
@@ -4099,8 +4147,8 @@
         </p:nvSpPr>
         <p:spPr>
           <a:xfrm>
-            <a:off x="2885629" y="7616279"/>
-            <a:ext cx="5739929" cy="590550"/>
+            <a:off x="2691705" y="7613184"/>
+            <a:ext cx="6224736" cy="594360"/>
           </a:xfrm>
           <a:prstGeom prst="rect">
             <a:avLst/>
@@ -4113,7 +4161,11 @@
           </a:bodyPr>
           <a:lstStyle/>
           <a:p>
-            <a:pPr algn="l"/>
+            <a:pPr algn="l">
+              <a:lnSpc>
+                <a:spcPts val="4680"/>
+              </a:lnSpc>
+            </a:pPr>
             <a:r>
               <a:rPr sz="3900" b="1" spc="-117">
                 <a:solidFill>
@@ -4136,8 +4188,8 @@
         </p:nvSpPr>
         <p:spPr>
           <a:xfrm>
-            <a:off x="3515469" y="8349704"/>
-            <a:ext cx="4165141" cy="314325"/>
+            <a:off x="3393877" y="8327708"/>
+            <a:ext cx="4469309" cy="372904"/>
           </a:xfrm>
           <a:prstGeom prst="rect">
             <a:avLst/>
@@ -4150,7 +4202,11 @@
           </a:bodyPr>
           <a:lstStyle/>
           <a:p>
-            <a:pPr algn="l"/>
+            <a:pPr algn="l">
+              <a:lnSpc>
+                <a:spcPts val="2936"/>
+              </a:lnSpc>
+            </a:pPr>
             <a:r>
               <a:rPr sz="2025" b="1">
                 <a:solidFill>
@@ -4173,8 +4229,8 @@
         </p:nvSpPr>
         <p:spPr>
           <a:xfrm>
-            <a:off x="5005239" y="9198769"/>
-            <a:ext cx="440717" cy="342900"/>
+            <a:off x="5000625" y="9206061"/>
+            <a:ext cx="452438" cy="342900"/>
           </a:xfrm>
           <a:prstGeom prst="rect">
             <a:avLst/>
@@ -4187,7 +4243,11 @@
           </a:bodyPr>
           <a:lstStyle/>
           <a:p>
-            <a:pPr algn="l"/>
+            <a:pPr algn="l">
+              <a:lnSpc>
+                <a:spcPts val="2700"/>
+              </a:lnSpc>
+            </a:pPr>
             <a:r>
               <a:rPr sz="2250" b="0">
                 <a:solidFill>
@@ -4210,12 +4270,12 @@
         </p:nvSpPr>
         <p:spPr>
           <a:xfrm>
-            <a:off x="838200" y="9627394"/>
-            <a:ext cx="8610600" cy="2001589"/>
+            <a:off x="838200" y="9634686"/>
+            <a:ext cx="8610600" cy="2003375"/>
           </a:xfrm>
           <a:prstGeom prst="roundRect">
             <a:avLst>
-              <a:gd name="adj" fmla="val 11420"/>
+              <a:gd name="adj" fmla="val 11410"/>
             </a:avLst>
           </a:prstGeom>
           <a:solidFill>
@@ -4254,8 +4314,8 @@
         </p:nvSpPr>
         <p:spPr>
           <a:xfrm>
-            <a:off x="1257300" y="9970294"/>
-            <a:ext cx="902084" cy="276225"/>
+            <a:off x="1257300" y="9969014"/>
+            <a:ext cx="964034" cy="274320"/>
           </a:xfrm>
           <a:prstGeom prst="rect">
             <a:avLst/>
@@ -4268,7 +4328,11 @@
           </a:bodyPr>
           <a:lstStyle/>
           <a:p>
-            <a:pPr algn="l"/>
+            <a:pPr algn="l">
+              <a:lnSpc>
+                <a:spcPts val="2160"/>
+              </a:lnSpc>
+            </a:pPr>
             <a:r>
               <a:rPr sz="1800" b="1">
                 <a:solidFill>
@@ -4291,8 +4355,8 @@
         </p:nvSpPr>
         <p:spPr>
           <a:xfrm>
-            <a:off x="1257300" y="10322719"/>
-            <a:ext cx="4140398" cy="476250"/>
+            <a:off x="1257300" y="10321409"/>
+            <a:ext cx="4475820" cy="480060"/>
           </a:xfrm>
           <a:prstGeom prst="rect">
             <a:avLst/>
@@ -4305,7 +4369,11 @@
           </a:bodyPr>
           <a:lstStyle/>
           <a:p>
-            <a:pPr algn="l"/>
+            <a:pPr algn="l">
+              <a:lnSpc>
+                <a:spcPts val="3779"/>
+              </a:lnSpc>
+            </a:pPr>
             <a:r>
               <a:rPr sz="3150" b="1" spc="-94">
                 <a:solidFill>
@@ -4328,8 +4396,8 @@
         </p:nvSpPr>
         <p:spPr>
           <a:xfrm>
-            <a:off x="1257300" y="10941844"/>
-            <a:ext cx="6839396" cy="314325"/>
+            <a:off x="1257300" y="10921633"/>
+            <a:ext cx="7321600" cy="372904"/>
           </a:xfrm>
           <a:prstGeom prst="rect">
             <a:avLst/>
@@ -4342,7 +4410,11 @@
           </a:bodyPr>
           <a:lstStyle/>
           <a:p>
-            <a:pPr algn="l"/>
+            <a:pPr algn="l">
+              <a:lnSpc>
+                <a:spcPts val="2936"/>
+              </a:lnSpc>
+            </a:pPr>
             <a:r>
               <a:rPr sz="2025" b="0">
                 <a:solidFill>
@@ -4433,8 +4505,8 @@
         </p:nvSpPr>
         <p:spPr>
           <a:xfrm>
-            <a:off x="7322820" y="11849100"/>
-            <a:ext cx="2125980" cy="247650"/>
+            <a:off x="7272129" y="11845260"/>
+            <a:ext cx="2176671" cy="251460"/>
           </a:xfrm>
           <a:prstGeom prst="rect">
             <a:avLst/>
@@ -4447,7 +4519,11 @@
           </a:bodyPr>
           <a:lstStyle/>
           <a:p>
-            <a:pPr algn="r"/>
+            <a:pPr algn="r">
+              <a:lnSpc>
+                <a:spcPts val="1979"/>
+              </a:lnSpc>
+            </a:pPr>
             <a:r>
               <a:rPr sz="1650" b="0">
                 <a:solidFill>
@@ -4496,8 +4572,8 @@
         </p:nvSpPr>
         <p:spPr>
           <a:xfrm>
-            <a:off x="838200" y="914400"/>
-            <a:ext cx="1564742" cy="295275"/>
+            <a:off x="838200" y="913448"/>
+            <a:ext cx="1648085" cy="297180"/>
           </a:xfrm>
           <a:prstGeom prst="rect">
             <a:avLst/>
@@ -4510,7 +4586,11 @@
           </a:bodyPr>
           <a:lstStyle/>
           <a:p>
-            <a:pPr algn="l"/>
+            <a:pPr algn="l">
+              <a:lnSpc>
+                <a:spcPts val="2340"/>
+              </a:lnSpc>
+            </a:pPr>
             <a:r>
               <a:rPr sz="1950" b="1" spc="-20">
                 <a:solidFill>
@@ -4533,8 +4613,8 @@
         </p:nvSpPr>
         <p:spPr>
           <a:xfrm>
-            <a:off x="8747001" y="923925"/>
-            <a:ext cx="701799" cy="276225"/>
+            <a:off x="8755320" y="917138"/>
+            <a:ext cx="693480" cy="274320"/>
           </a:xfrm>
           <a:prstGeom prst="rect">
             <a:avLst/>
@@ -4547,7 +4627,11 @@
           </a:bodyPr>
           <a:lstStyle/>
           <a:p>
-            <a:pPr algn="r"/>
+            <a:pPr algn="r">
+              <a:lnSpc>
+                <a:spcPts val="2160"/>
+              </a:lnSpc>
+            </a:pPr>
             <a:r>
               <a:rPr sz="1800" b="0" spc="-18">
                 <a:solidFill>
@@ -4570,8 +4654,8 @@
         </p:nvSpPr>
         <p:spPr>
           <a:xfrm>
-            <a:off x="838200" y="1457325"/>
-            <a:ext cx="8507574" cy="1655713"/>
+            <a:off x="838200" y="1474160"/>
+            <a:ext cx="9196648" cy="1635139"/>
           </a:xfrm>
           <a:prstGeom prst="rect">
             <a:avLst/>
@@ -4629,12 +4713,12 @@
         </p:nvSpPr>
         <p:spPr>
           <a:xfrm>
-            <a:off x="838200" y="3644801"/>
-            <a:ext cx="8610600" cy="1428750"/>
+            <a:off x="838200" y="3646587"/>
+            <a:ext cx="8610600" cy="1432322"/>
           </a:xfrm>
           <a:prstGeom prst="roundRect">
             <a:avLst>
-              <a:gd name="adj" fmla="val 14666"/>
+              <a:gd name="adj" fmla="val 14630"/>
             </a:avLst>
           </a:prstGeom>
           <a:solidFill>
@@ -4673,8 +4757,8 @@
         </p:nvSpPr>
         <p:spPr>
           <a:xfrm>
-            <a:off x="1219200" y="4130576"/>
-            <a:ext cx="492621" cy="457200"/>
+            <a:off x="1219200" y="4134148"/>
+            <a:ext cx="519224" cy="457200"/>
           </a:xfrm>
           <a:prstGeom prst="rect">
             <a:avLst/>
@@ -4687,7 +4771,11 @@
           </a:bodyPr>
           <a:lstStyle/>
           <a:p>
-            <a:pPr algn="l"/>
+            <a:pPr algn="l">
+              <a:lnSpc>
+                <a:spcPts val="3600"/>
+              </a:lnSpc>
+            </a:pPr>
             <a:r>
               <a:rPr sz="3000" b="1" spc="-90">
                 <a:solidFill>
@@ -4710,8 +4798,8 @@
         </p:nvSpPr>
         <p:spPr>
           <a:xfrm>
-            <a:off x="2647950" y="3968651"/>
-            <a:ext cx="1168115" cy="409575"/>
+            <a:off x="2647950" y="3964722"/>
+            <a:ext cx="1239738" cy="411480"/>
           </a:xfrm>
           <a:prstGeom prst="rect">
             <a:avLst/>
@@ -4724,7 +4812,11 @@
           </a:bodyPr>
           <a:lstStyle/>
           <a:p>
-            <a:pPr algn="l"/>
+            <a:pPr algn="l">
+              <a:lnSpc>
+                <a:spcPts val="3240"/>
+              </a:lnSpc>
+            </a:pPr>
             <a:r>
               <a:rPr sz="2700" b="1" spc="-81">
                 <a:solidFill>
@@ -4747,8 +4839,8 @@
         </p:nvSpPr>
         <p:spPr>
           <a:xfrm>
-            <a:off x="2647950" y="4454426"/>
-            <a:ext cx="5288979" cy="295275"/>
+            <a:off x="2647950" y="4457045"/>
+            <a:ext cx="5655097" cy="297180"/>
           </a:xfrm>
           <a:prstGeom prst="rect">
             <a:avLst/>
@@ -4761,7 +4853,11 @@
           </a:bodyPr>
           <a:lstStyle/>
           <a:p>
-            <a:pPr algn="l"/>
+            <a:pPr algn="l">
+              <a:lnSpc>
+                <a:spcPts val="2340"/>
+              </a:lnSpc>
+            </a:pPr>
             <a:r>
               <a:rPr sz="1950" b="0">
                 <a:solidFill>
@@ -4784,12 +4880,12 @@
         </p:nvSpPr>
         <p:spPr>
           <a:xfrm>
-            <a:off x="838200" y="5245001"/>
-            <a:ext cx="8610600" cy="1428750"/>
+            <a:off x="838200" y="5250359"/>
+            <a:ext cx="8610600" cy="1432322"/>
           </a:xfrm>
           <a:prstGeom prst="roundRect">
             <a:avLst>
-              <a:gd name="adj" fmla="val 14666"/>
+              <a:gd name="adj" fmla="val 14630"/>
             </a:avLst>
           </a:prstGeom>
           <a:solidFill>
@@ -4828,8 +4924,8 @@
         </p:nvSpPr>
         <p:spPr>
           <a:xfrm>
-            <a:off x="1219200" y="5730776"/>
-            <a:ext cx="889992" cy="457200"/>
+            <a:off x="1219200" y="5737920"/>
+            <a:ext cx="943012" cy="457200"/>
           </a:xfrm>
           <a:prstGeom prst="rect">
             <a:avLst/>
@@ -4842,7 +4938,11 @@
           </a:bodyPr>
           <a:lstStyle/>
           <a:p>
-            <a:pPr algn="l"/>
+            <a:pPr algn="l">
+              <a:lnSpc>
+                <a:spcPts val="3600"/>
+              </a:lnSpc>
+            </a:pPr>
             <a:r>
               <a:rPr sz="3000" b="1" spc="-90">
                 <a:solidFill>
@@ -4865,8 +4965,8 @@
         </p:nvSpPr>
         <p:spPr>
           <a:xfrm>
-            <a:off x="2647950" y="5568851"/>
-            <a:ext cx="3399606" cy="409575"/>
+            <a:off x="2647950" y="5568494"/>
+            <a:ext cx="3635871" cy="411480"/>
           </a:xfrm>
           <a:prstGeom prst="rect">
             <a:avLst/>
@@ -4879,7 +4979,11 @@
           </a:bodyPr>
           <a:lstStyle/>
           <a:p>
-            <a:pPr algn="l"/>
+            <a:pPr algn="l">
+              <a:lnSpc>
+                <a:spcPts val="3240"/>
+              </a:lnSpc>
+            </a:pPr>
             <a:r>
               <a:rPr sz="2700" b="1" spc="-81">
                 <a:solidFill>
@@ -4902,8 +5006,8 @@
         </p:nvSpPr>
         <p:spPr>
           <a:xfrm>
-            <a:off x="2647950" y="6054626"/>
-            <a:ext cx="3803861" cy="295275"/>
+            <a:off x="2647950" y="6060817"/>
+            <a:ext cx="4057427" cy="297180"/>
           </a:xfrm>
           <a:prstGeom prst="rect">
             <a:avLst/>
@@ -4916,7 +5020,11 @@
           </a:bodyPr>
           <a:lstStyle/>
           <a:p>
-            <a:pPr algn="l"/>
+            <a:pPr algn="l">
+              <a:lnSpc>
+                <a:spcPts val="2340"/>
+              </a:lnSpc>
+            </a:pPr>
             <a:r>
               <a:rPr sz="1950" b="0">
                 <a:solidFill>
@@ -4939,12 +5047,12 @@
         </p:nvSpPr>
         <p:spPr>
           <a:xfrm>
-            <a:off x="838200" y="6845201"/>
-            <a:ext cx="8610600" cy="1428750"/>
+            <a:off x="838200" y="6854130"/>
+            <a:ext cx="8610600" cy="1432322"/>
           </a:xfrm>
           <a:prstGeom prst="roundRect">
             <a:avLst>
-              <a:gd name="adj" fmla="val 14666"/>
+              <a:gd name="adj" fmla="val 14630"/>
             </a:avLst>
           </a:prstGeom>
           <a:solidFill>
@@ -4983,8 +5091,8 @@
         </p:nvSpPr>
         <p:spPr>
           <a:xfrm>
-            <a:off x="1219200" y="7330976"/>
-            <a:ext cx="1287363" cy="457200"/>
+            <a:off x="1219200" y="7341691"/>
+            <a:ext cx="1366986" cy="457200"/>
           </a:xfrm>
           <a:prstGeom prst="rect">
             <a:avLst/>
@@ -4997,7 +5105,11 @@
           </a:bodyPr>
           <a:lstStyle/>
           <a:p>
-            <a:pPr algn="l"/>
+            <a:pPr algn="l">
+              <a:lnSpc>
+                <a:spcPts val="3600"/>
+              </a:lnSpc>
+            </a:pPr>
             <a:r>
               <a:rPr sz="3000" b="1" spc="-90">
                 <a:solidFill>
@@ -5020,8 +5132,8 @@
         </p:nvSpPr>
         <p:spPr>
           <a:xfrm>
-            <a:off x="2647950" y="7169051"/>
-            <a:ext cx="3127809" cy="409575"/>
+            <a:off x="2647950" y="7172265"/>
+            <a:ext cx="3361469" cy="411480"/>
           </a:xfrm>
           <a:prstGeom prst="rect">
             <a:avLst/>
@@ -5034,7 +5146,11 @@
           </a:bodyPr>
           <a:lstStyle/>
           <a:p>
-            <a:pPr algn="l"/>
+            <a:pPr algn="l">
+              <a:lnSpc>
+                <a:spcPts val="3240"/>
+              </a:lnSpc>
+            </a:pPr>
             <a:r>
               <a:rPr sz="2700" b="1" spc="-81">
                 <a:solidFill>
@@ -5057,12 +5173,12 @@
         </p:nvSpPr>
         <p:spPr>
           <a:xfrm>
-            <a:off x="5188297" y="7197626"/>
-            <a:ext cx="933004" cy="323850"/>
+            <a:off x="5375225" y="7216080"/>
+            <a:ext cx="985689" cy="327571"/>
           </a:xfrm>
           <a:prstGeom prst="roundRect">
             <a:avLst>
-              <a:gd name="adj" fmla="val 23529"/>
+              <a:gd name="adj" fmla="val 23262"/>
             </a:avLst>
           </a:prstGeom>
           <a:solidFill>
@@ -5101,8 +5217,8 @@
         </p:nvSpPr>
         <p:spPr>
           <a:xfrm>
-            <a:off x="5188297" y="7197626"/>
-            <a:ext cx="933004" cy="323850"/>
+            <a:off x="5375225" y="7216080"/>
+            <a:ext cx="985689" cy="327571"/>
           </a:xfrm>
           <a:prstGeom prst="rect">
             <a:avLst/>
@@ -5115,7 +5231,11 @@
           </a:bodyPr>
           <a:lstStyle/>
           <a:p>
-            <a:pPr algn="ctr"/>
+            <a:pPr algn="ctr">
+              <a:lnSpc>
+                <a:spcPts val="1979"/>
+              </a:lnSpc>
+            </a:pPr>
             <a:r>
               <a:rPr sz="1650" b="1" spc="-81">
                 <a:solidFill>
@@ -5138,8 +5258,8 @@
         </p:nvSpPr>
         <p:spPr>
           <a:xfrm>
-            <a:off x="2647950" y="7654826"/>
-            <a:ext cx="6334125" cy="295275"/>
+            <a:off x="2647950" y="7664589"/>
+            <a:ext cx="6768517" cy="297180"/>
           </a:xfrm>
           <a:prstGeom prst="rect">
             <a:avLst/>
@@ -5152,7 +5272,11 @@
           </a:bodyPr>
           <a:lstStyle/>
           <a:p>
-            <a:pPr algn="l"/>
+            <a:pPr algn="l">
+              <a:lnSpc>
+                <a:spcPts val="2340"/>
+              </a:lnSpc>
+            </a:pPr>
             <a:r>
               <a:rPr sz="1950" b="0">
                 <a:solidFill>
@@ -5175,12 +5299,12 @@
         </p:nvSpPr>
         <p:spPr>
           <a:xfrm>
-            <a:off x="838200" y="8597801"/>
-            <a:ext cx="8610600" cy="1876425"/>
+            <a:off x="838200" y="8610302"/>
+            <a:ext cx="8610600" cy="1872555"/>
           </a:xfrm>
           <a:prstGeom prst="roundRect">
             <a:avLst>
-              <a:gd name="adj" fmla="val 11167"/>
+              <a:gd name="adj" fmla="val 11190"/>
             </a:avLst>
           </a:prstGeom>
           <a:noFill/>
@@ -5220,8 +5344,8 @@
         </p:nvSpPr>
         <p:spPr>
           <a:xfrm>
-            <a:off x="1238250" y="8902601"/>
-            <a:ext cx="3515506" cy="266700"/>
+            <a:off x="1238250" y="8907482"/>
+            <a:ext cx="3747306" cy="262890"/>
           </a:xfrm>
           <a:prstGeom prst="rect">
             <a:avLst/>
@@ -5234,7 +5358,11 @@
           </a:bodyPr>
           <a:lstStyle/>
           <a:p>
-            <a:pPr algn="l"/>
+            <a:pPr algn="l">
+              <a:lnSpc>
+                <a:spcPts val="2070"/>
+              </a:lnSpc>
+            </a:pPr>
             <a:r>
               <a:rPr sz="1725" b="1">
                 <a:solidFill>
@@ -5257,8 +5385,8 @@
         </p:nvSpPr>
         <p:spPr>
           <a:xfrm>
-            <a:off x="1238250" y="9321701"/>
-            <a:ext cx="6582668" cy="795338"/>
+            <a:off x="1238250" y="9285089"/>
+            <a:ext cx="7108217" cy="885825"/>
           </a:xfrm>
           <a:prstGeom prst="rect">
             <a:avLst/>
@@ -5338,8 +5466,8 @@
         </p:nvSpPr>
         <p:spPr>
           <a:xfrm>
-            <a:off x="3505498" y="9533156"/>
-            <a:ext cx="2922687" cy="140970"/>
+            <a:off x="3694956" y="9549408"/>
+            <a:ext cx="3153668" cy="171450"/>
           </a:xfrm>
           <a:prstGeom prst="rect">
             <a:avLst/>
@@ -5448,8 +5576,8 @@
         </p:nvSpPr>
         <p:spPr>
           <a:xfrm>
-            <a:off x="7175778" y="11849100"/>
-            <a:ext cx="2273022" cy="247650"/>
+            <a:off x="6999714" y="11845260"/>
+            <a:ext cx="2449086" cy="251460"/>
           </a:xfrm>
           <a:prstGeom prst="rect">
             <a:avLst/>
@@ -5462,7 +5590,11 @@
           </a:bodyPr>
           <a:lstStyle/>
           <a:p>
-            <a:pPr algn="r"/>
+            <a:pPr algn="r">
+              <a:lnSpc>
+                <a:spcPts val="1979"/>
+              </a:lnSpc>
+            </a:pPr>
             <a:r>
               <a:rPr sz="1650" b="0">
                 <a:solidFill>
@@ -5511,8 +5643,8 @@
         </p:nvSpPr>
         <p:spPr>
           <a:xfrm>
-            <a:off x="838200" y="914400"/>
-            <a:ext cx="1573485" cy="295275"/>
+            <a:off x="838200" y="913448"/>
+            <a:ext cx="1648085" cy="297180"/>
           </a:xfrm>
           <a:prstGeom prst="rect">
             <a:avLst/>
@@ -5525,7 +5657,11 @@
           </a:bodyPr>
           <a:lstStyle/>
           <a:p>
-            <a:pPr algn="l"/>
+            <a:pPr algn="l">
+              <a:lnSpc>
+                <a:spcPts val="2340"/>
+              </a:lnSpc>
+            </a:pPr>
             <a:r>
               <a:rPr sz="1950" b="1" spc="-20">
                 <a:solidFill>
@@ -5548,8 +5684,8 @@
         </p:nvSpPr>
         <p:spPr>
           <a:xfrm>
-            <a:off x="8747001" y="923925"/>
-            <a:ext cx="701799" cy="276225"/>
+            <a:off x="8755320" y="917138"/>
+            <a:ext cx="693480" cy="274320"/>
           </a:xfrm>
           <a:prstGeom prst="rect">
             <a:avLst/>
@@ -5562,7 +5698,11 @@
           </a:bodyPr>
           <a:lstStyle/>
           <a:p>
-            <a:pPr algn="r"/>
+            <a:pPr algn="r">
+              <a:lnSpc>
+                <a:spcPts val="2160"/>
+              </a:lnSpc>
+            </a:pPr>
             <a:r>
               <a:rPr sz="1800" b="0" spc="-18">
                 <a:solidFill>
@@ -5585,8 +5725,8 @@
         </p:nvSpPr>
         <p:spPr>
           <a:xfrm>
-            <a:off x="838200" y="1466850"/>
-            <a:ext cx="8252520" cy="1696938"/>
+            <a:off x="838200" y="1477399"/>
+            <a:ext cx="8946989" cy="1679412"/>
           </a:xfrm>
           <a:prstGeom prst="rect">
             <a:avLst/>
@@ -5655,8 +5795,8 @@
         </p:nvSpPr>
         <p:spPr>
           <a:xfrm>
-            <a:off x="1210866" y="4022527"/>
-            <a:ext cx="1296293" cy="247650"/>
+            <a:off x="1149251" y="4020473"/>
+            <a:ext cx="1373312" cy="251460"/>
           </a:xfrm>
           <a:prstGeom prst="rect">
             <a:avLst/>
@@ -5669,7 +5809,11 @@
           </a:bodyPr>
           <a:lstStyle/>
           <a:p>
-            <a:pPr algn="l"/>
+            <a:pPr algn="l">
+              <a:lnSpc>
+                <a:spcPts val="1979"/>
+              </a:lnSpc>
+            </a:pPr>
             <a:r>
               <a:rPr sz="1650" b="0">
                 <a:solidFill>
@@ -5692,7 +5836,7 @@
         </p:nvSpPr>
         <p:spPr>
           <a:xfrm>
-            <a:off x="2381250" y="3689152"/>
+            <a:off x="2381250" y="3690938"/>
             <a:ext cx="2279600" cy="914400"/>
           </a:xfrm>
           <a:prstGeom prst="roundRect">
@@ -5736,7 +5880,7 @@
         </p:nvSpPr>
         <p:spPr>
           <a:xfrm>
-            <a:off x="4775150" y="3689152"/>
+            <a:off x="4775150" y="3690938"/>
             <a:ext cx="2279600" cy="914400"/>
           </a:xfrm>
           <a:prstGeom prst="roundRect">
@@ -5780,7 +5924,7 @@
         </p:nvSpPr>
         <p:spPr>
           <a:xfrm>
-            <a:off x="7169051" y="3689152"/>
+            <a:off x="7169051" y="3690938"/>
             <a:ext cx="2279600" cy="914400"/>
           </a:xfrm>
           <a:prstGeom prst="roundRect">
@@ -5824,8 +5968,8 @@
         </p:nvSpPr>
         <p:spPr>
           <a:xfrm>
-            <a:off x="1391989" y="5051227"/>
-            <a:ext cx="1069888" cy="247650"/>
+            <a:off x="1341983" y="5049173"/>
+            <a:ext cx="1132396" cy="251460"/>
           </a:xfrm>
           <a:prstGeom prst="rect">
             <a:avLst/>
@@ -5838,7 +5982,11 @@
           </a:bodyPr>
           <a:lstStyle/>
           <a:p>
-            <a:pPr algn="l"/>
+            <a:pPr algn="l">
+              <a:lnSpc>
+                <a:spcPts val="1979"/>
+              </a:lnSpc>
+            </a:pPr>
             <a:r>
               <a:rPr sz="1650" b="0">
                 <a:solidFill>
@@ -5861,7 +6009,7 @@
         </p:nvSpPr>
         <p:spPr>
           <a:xfrm>
-            <a:off x="2381250" y="4717852"/>
+            <a:off x="2381250" y="4719638"/>
             <a:ext cx="2279600" cy="914400"/>
           </a:xfrm>
           <a:prstGeom prst="roundRect">
@@ -5905,7 +6053,7 @@
         </p:nvSpPr>
         <p:spPr>
           <a:xfrm>
-            <a:off x="4775150" y="4717852"/>
+            <a:off x="4775150" y="4719638"/>
             <a:ext cx="2279600" cy="914400"/>
           </a:xfrm>
           <a:prstGeom prst="roundRect">
@@ -5949,7 +6097,7 @@
         </p:nvSpPr>
         <p:spPr>
           <a:xfrm>
-            <a:off x="7169051" y="4717852"/>
+            <a:off x="7169051" y="4719638"/>
             <a:ext cx="2279600" cy="914400"/>
           </a:xfrm>
           <a:prstGeom prst="roundRect">
@@ -5993,8 +6141,8 @@
         </p:nvSpPr>
         <p:spPr>
           <a:xfrm>
-            <a:off x="1628329" y="6079927"/>
-            <a:ext cx="774464" cy="247650"/>
+            <a:off x="1593205" y="6077873"/>
+            <a:ext cx="818369" cy="251460"/>
           </a:xfrm>
           <a:prstGeom prst="rect">
             <a:avLst/>
@@ -6007,7 +6155,11 @@
           </a:bodyPr>
           <a:lstStyle/>
           <a:p>
-            <a:pPr algn="l"/>
+            <a:pPr algn="l">
+              <a:lnSpc>
+                <a:spcPts val="1979"/>
+              </a:lnSpc>
+            </a:pPr>
             <a:r>
               <a:rPr sz="1650" b="0">
                 <a:solidFill>
@@ -6030,7 +6182,7 @@
         </p:nvSpPr>
         <p:spPr>
           <a:xfrm>
-            <a:off x="2381250" y="5746552"/>
+            <a:off x="2381250" y="5748338"/>
             <a:ext cx="2279600" cy="914400"/>
           </a:xfrm>
           <a:prstGeom prst="roundRect">
@@ -6074,7 +6226,7 @@
         </p:nvSpPr>
         <p:spPr>
           <a:xfrm>
-            <a:off x="2381250" y="5746552"/>
+            <a:off x="2381250" y="5748338"/>
             <a:ext cx="2279600" cy="914400"/>
           </a:xfrm>
           <a:prstGeom prst="rect">
@@ -6088,7 +6240,11 @@
           </a:bodyPr>
           <a:lstStyle/>
           <a:p>
-            <a:pPr algn="ctr"/>
+            <a:pPr algn="ctr">
+              <a:lnSpc>
+                <a:spcPts val="2700"/>
+              </a:lnSpc>
+            </a:pPr>
             <a:r>
               <a:rPr sz="2250" b="1">
                 <a:solidFill>
@@ -6111,7 +6267,7 @@
         </p:nvSpPr>
         <p:spPr>
           <a:xfrm>
-            <a:off x="4775150" y="5746552"/>
+            <a:off x="4775150" y="5748338"/>
             <a:ext cx="2279600" cy="914400"/>
           </a:xfrm>
           <a:prstGeom prst="roundRect">
@@ -6155,7 +6311,7 @@
         </p:nvSpPr>
         <p:spPr>
           <a:xfrm>
-            <a:off x="4775150" y="5746552"/>
+            <a:off x="4775150" y="5748338"/>
             <a:ext cx="2279600" cy="914400"/>
           </a:xfrm>
           <a:prstGeom prst="rect">
@@ -6169,7 +6325,11 @@
           </a:bodyPr>
           <a:lstStyle/>
           <a:p>
-            <a:pPr algn="ctr"/>
+            <a:pPr algn="ctr">
+              <a:lnSpc>
+                <a:spcPts val="2700"/>
+              </a:lnSpc>
+            </a:pPr>
             <a:r>
               <a:rPr sz="2250" b="1">
                 <a:solidFill>
@@ -6192,7 +6352,7 @@
         </p:nvSpPr>
         <p:spPr>
           <a:xfrm>
-            <a:off x="7169051" y="5746552"/>
+            <a:off x="7169051" y="5748338"/>
             <a:ext cx="2279600" cy="914400"/>
           </a:xfrm>
           <a:prstGeom prst="roundRect">
@@ -6236,7 +6396,7 @@
         </p:nvSpPr>
         <p:spPr>
           <a:xfrm>
-            <a:off x="7169051" y="5746552"/>
+            <a:off x="7169051" y="5748338"/>
             <a:ext cx="2279600" cy="914400"/>
           </a:xfrm>
           <a:prstGeom prst="rect">
@@ -6250,7 +6410,11 @@
           </a:bodyPr>
           <a:lstStyle/>
           <a:p>
-            <a:pPr algn="ctr"/>
+            <a:pPr algn="ctr">
+              <a:lnSpc>
+                <a:spcPts val="2700"/>
+              </a:lnSpc>
+            </a:pPr>
             <a:r>
               <a:rPr sz="2250" b="1">
                 <a:solidFill>
@@ -6273,8 +6437,8 @@
         </p:nvSpPr>
         <p:spPr>
           <a:xfrm>
-            <a:off x="3133130" y="6775252"/>
-            <a:ext cx="1064865" cy="247650"/>
+            <a:off x="3106043" y="6775132"/>
+            <a:ext cx="1132582" cy="251460"/>
           </a:xfrm>
           <a:prstGeom prst="rect">
             <a:avLst/>
@@ -6287,7 +6451,11 @@
           </a:bodyPr>
           <a:lstStyle/>
           <a:p>
-            <a:pPr algn="l"/>
+            <a:pPr algn="l">
+              <a:lnSpc>
+                <a:spcPts val="1979"/>
+              </a:lnSpc>
+            </a:pPr>
             <a:r>
               <a:rPr sz="1650" b="0">
                 <a:solidFill>
@@ -6310,8 +6478,8 @@
         </p:nvSpPr>
         <p:spPr>
           <a:xfrm>
-            <a:off x="5527030" y="6775252"/>
-            <a:ext cx="1064865" cy="247650"/>
+            <a:off x="5499943" y="6775132"/>
+            <a:ext cx="1132582" cy="251460"/>
           </a:xfrm>
           <a:prstGeom prst="rect">
             <a:avLst/>
@@ -6324,7 +6492,11 @@
           </a:bodyPr>
           <a:lstStyle/>
           <a:p>
-            <a:pPr algn="l"/>
+            <a:pPr algn="l">
+              <a:lnSpc>
+                <a:spcPts val="1979"/>
+              </a:lnSpc>
+            </a:pPr>
             <a:r>
               <a:rPr sz="1650" b="0">
                 <a:solidFill>
@@ -6347,8 +6519,8 @@
         </p:nvSpPr>
         <p:spPr>
           <a:xfrm>
-            <a:off x="8037165" y="6775252"/>
-            <a:ext cx="774464" cy="247650"/>
+            <a:off x="8019604" y="6775132"/>
+            <a:ext cx="818369" cy="251460"/>
           </a:xfrm>
           <a:prstGeom prst="rect">
             <a:avLst/>
@@ -6361,7 +6533,11 @@
           </a:bodyPr>
           <a:lstStyle/>
           <a:p>
-            <a:pPr algn="l"/>
+            <a:pPr algn="l">
+              <a:lnSpc>
+                <a:spcPts val="1979"/>
+              </a:lnSpc>
+            </a:pPr>
             <a:r>
               <a:rPr sz="1650" b="0">
                 <a:solidFill>
@@ -6384,8 +6560,8 @@
         </p:nvSpPr>
         <p:spPr>
           <a:xfrm>
-            <a:off x="5455384" y="7156252"/>
-            <a:ext cx="3993416" cy="228600"/>
+            <a:off x="5190515" y="7156996"/>
+            <a:ext cx="4258285" cy="228600"/>
           </a:xfrm>
           <a:prstGeom prst="rect">
             <a:avLst/>
@@ -6398,7 +6574,11 @@
           </a:bodyPr>
           <a:lstStyle/>
           <a:p>
-            <a:pPr algn="r"/>
+            <a:pPr algn="r">
+              <a:lnSpc>
+                <a:spcPts val="1800"/>
+              </a:lnSpc>
+            </a:pPr>
             <a:r>
               <a:rPr sz="1500" b="0">
                 <a:solidFill>
@@ -6421,7 +6601,7 @@
         </p:nvSpPr>
         <p:spPr>
           <a:xfrm>
-            <a:off x="838200" y="7803952"/>
+            <a:off x="838200" y="7809458"/>
             <a:ext cx="495300" cy="495300"/>
           </a:xfrm>
           <a:prstGeom prst="ellipse">
@@ -6463,7 +6643,7 @@
         </p:nvSpPr>
         <p:spPr>
           <a:xfrm>
-            <a:off x="838200" y="7803952"/>
+            <a:off x="838200" y="7809458"/>
             <a:ext cx="495300" cy="495300"/>
           </a:xfrm>
           <a:prstGeom prst="rect">
@@ -6477,7 +6657,11 @@
           </a:bodyPr>
           <a:lstStyle/>
           <a:p>
-            <a:pPr algn="ctr"/>
+            <a:pPr algn="ctr">
+              <a:lnSpc>
+                <a:spcPts val="2340"/>
+              </a:lnSpc>
+            </a:pPr>
             <a:r>
               <a:rPr sz="1950" b="1">
                 <a:solidFill>
@@ -6500,8 +6684,8 @@
         </p:nvSpPr>
         <p:spPr>
           <a:xfrm>
-            <a:off x="1562100" y="7803952"/>
-            <a:ext cx="4810311" cy="381000"/>
+            <a:off x="1562100" y="7800886"/>
+            <a:ext cx="5183870" cy="388620"/>
           </a:xfrm>
           <a:prstGeom prst="rect">
             <a:avLst/>
@@ -6514,7 +6698,11 @@
           </a:bodyPr>
           <a:lstStyle/>
           <a:p>
-            <a:pPr algn="l"/>
+            <a:pPr algn="l">
+              <a:lnSpc>
+                <a:spcPts val="3060"/>
+              </a:lnSpc>
+            </a:pPr>
             <a:r>
               <a:rPr sz="2550" b="1" spc="-76">
                 <a:solidFill>
@@ -6537,8 +6725,8 @@
         </p:nvSpPr>
         <p:spPr>
           <a:xfrm>
-            <a:off x="1562100" y="8242102"/>
-            <a:ext cx="3799210" cy="285750"/>
+            <a:off x="1562100" y="8255198"/>
+            <a:ext cx="4017057" cy="285750"/>
           </a:xfrm>
           <a:prstGeom prst="rect">
             <a:avLst/>
@@ -6551,7 +6739,11 @@
           </a:bodyPr>
           <a:lstStyle/>
           <a:p>
-            <a:pPr algn="l"/>
+            <a:pPr algn="l">
+              <a:lnSpc>
+                <a:spcPts val="2250"/>
+              </a:lnSpc>
+            </a:pPr>
             <a:r>
               <a:rPr sz="1875" b="0">
                 <a:solidFill>
@@ -6574,7 +6766,7 @@
         </p:nvSpPr>
         <p:spPr>
           <a:xfrm>
-            <a:off x="838200" y="8775502"/>
+            <a:off x="838200" y="8788598"/>
             <a:ext cx="495300" cy="495300"/>
           </a:xfrm>
           <a:prstGeom prst="ellipse">
@@ -6616,7 +6808,7 @@
         </p:nvSpPr>
         <p:spPr>
           <a:xfrm>
-            <a:off x="838200" y="8775502"/>
+            <a:off x="838200" y="8788598"/>
             <a:ext cx="495300" cy="495300"/>
           </a:xfrm>
           <a:prstGeom prst="rect">
@@ -6630,7 +6822,11 @@
           </a:bodyPr>
           <a:lstStyle/>
           <a:p>
-            <a:pPr algn="ctr"/>
+            <a:pPr algn="ctr">
+              <a:lnSpc>
+                <a:spcPts val="2340"/>
+              </a:lnSpc>
+            </a:pPr>
             <a:r>
               <a:rPr sz="1950" b="1">
                 <a:solidFill>
@@ -6653,8 +6849,8 @@
         </p:nvSpPr>
         <p:spPr>
           <a:xfrm>
-            <a:off x="1562100" y="8775502"/>
-            <a:ext cx="5147965" cy="381000"/>
+            <a:off x="1562100" y="8780026"/>
+            <a:ext cx="5544034" cy="388620"/>
           </a:xfrm>
           <a:prstGeom prst="rect">
             <a:avLst/>
@@ -6667,7 +6863,11 @@
           </a:bodyPr>
           <a:lstStyle/>
           <a:p>
-            <a:pPr algn="l"/>
+            <a:pPr algn="l">
+              <a:lnSpc>
+                <a:spcPts val="3060"/>
+              </a:lnSpc>
+            </a:pPr>
             <a:r>
               <a:rPr sz="2550" b="1" spc="-76">
                 <a:solidFill>
@@ -6690,8 +6890,8 @@
         </p:nvSpPr>
         <p:spPr>
           <a:xfrm>
-            <a:off x="1562100" y="9213652"/>
-            <a:ext cx="3718285" cy="285750"/>
+            <a:off x="1562100" y="9234339"/>
+            <a:ext cx="3988966" cy="285750"/>
           </a:xfrm>
           <a:prstGeom prst="rect">
             <a:avLst/>
@@ -6704,7 +6904,11 @@
           </a:bodyPr>
           <a:lstStyle/>
           <a:p>
-            <a:pPr algn="l"/>
+            <a:pPr algn="l">
+              <a:lnSpc>
+                <a:spcPts val="2250"/>
+              </a:lnSpc>
+            </a:pPr>
             <a:r>
               <a:rPr sz="1875" b="0">
                 <a:solidFill>
@@ -6738,7 +6942,7 @@
         </p:nvSpPr>
         <p:spPr>
           <a:xfrm>
-            <a:off x="838200" y="9747052"/>
+            <a:off x="838200" y="9767739"/>
             <a:ext cx="495300" cy="495300"/>
           </a:xfrm>
           <a:prstGeom prst="ellipse">
@@ -6780,7 +6984,7 @@
         </p:nvSpPr>
         <p:spPr>
           <a:xfrm>
-            <a:off x="838200" y="9747052"/>
+            <a:off x="838200" y="9767739"/>
             <a:ext cx="495300" cy="495300"/>
           </a:xfrm>
           <a:prstGeom prst="rect">
@@ -6794,7 +6998,11 @@
           </a:bodyPr>
           <a:lstStyle/>
           <a:p>
-            <a:pPr algn="ctr"/>
+            <a:pPr algn="ctr">
+              <a:lnSpc>
+                <a:spcPts val="2340"/>
+              </a:lnSpc>
+            </a:pPr>
             <a:r>
               <a:rPr sz="1950" b="1">
                 <a:solidFill>
@@ -6817,8 +7025,8 @@
         </p:nvSpPr>
         <p:spPr>
           <a:xfrm>
-            <a:off x="1562100" y="9747052"/>
-            <a:ext cx="4391360" cy="381000"/>
+            <a:off x="1562100" y="9759166"/>
+            <a:ext cx="4722316" cy="388620"/>
           </a:xfrm>
           <a:prstGeom prst="rect">
             <a:avLst/>
@@ -6831,7 +7039,11 @@
           </a:bodyPr>
           <a:lstStyle/>
           <a:p>
-            <a:pPr algn="l"/>
+            <a:pPr algn="l">
+              <a:lnSpc>
+                <a:spcPts val="3060"/>
+              </a:lnSpc>
+            </a:pPr>
             <a:r>
               <a:rPr sz="2550" b="1" spc="-76">
                 <a:solidFill>
@@ -6854,8 +7066,8 @@
         </p:nvSpPr>
         <p:spPr>
           <a:xfrm>
-            <a:off x="1562100" y="10185202"/>
-            <a:ext cx="4936257" cy="285750"/>
+            <a:off x="1562100" y="10213479"/>
+            <a:ext cx="5249354" cy="285750"/>
           </a:xfrm>
           <a:prstGeom prst="rect">
             <a:avLst/>
@@ -6868,7 +7080,11 @@
           </a:bodyPr>
           <a:lstStyle/>
           <a:p>
-            <a:pPr algn="l"/>
+            <a:pPr algn="l">
+              <a:lnSpc>
+                <a:spcPts val="2250"/>
+              </a:lnSpc>
+            </a:pPr>
             <a:r>
               <a:rPr sz="1875" b="0">
                 <a:solidFill>
@@ -6939,8 +7155,8 @@
         </p:nvSpPr>
         <p:spPr>
           <a:xfrm>
-            <a:off x="7911956" y="11872912"/>
-            <a:ext cx="1536844" cy="276225"/>
+            <a:off x="7796257" y="11865233"/>
+            <a:ext cx="1652543" cy="274320"/>
           </a:xfrm>
           <a:prstGeom prst="rect">
             <a:avLst/>
@@ -6953,7 +7169,11 @@
           </a:bodyPr>
           <a:lstStyle/>
           <a:p>
-            <a:pPr algn="r"/>
+            <a:pPr algn="r">
+              <a:lnSpc>
+                <a:spcPts val="2160"/>
+              </a:lnSpc>
+            </a:pPr>
             <a:r>
               <a:rPr sz="1800" b="1">
                 <a:solidFill>
@@ -7002,8 +7222,8 @@
         </p:nvSpPr>
         <p:spPr>
           <a:xfrm>
-            <a:off x="838200" y="914400"/>
-            <a:ext cx="1511164" cy="295275"/>
+            <a:off x="838200" y="913448"/>
+            <a:ext cx="1564556" cy="297180"/>
           </a:xfrm>
           <a:prstGeom prst="rect">
             <a:avLst/>
@@ -7016,7 +7236,11 @@
           </a:bodyPr>
           <a:lstStyle/>
           <a:p>
-            <a:pPr algn="l"/>
+            <a:pPr algn="l">
+              <a:lnSpc>
+                <a:spcPts val="2340"/>
+              </a:lnSpc>
+            </a:pPr>
             <a:r>
               <a:rPr sz="1950" b="1" spc="-20">
                 <a:solidFill>
@@ -7039,8 +7263,8 @@
         </p:nvSpPr>
         <p:spPr>
           <a:xfrm>
-            <a:off x="8747001" y="923925"/>
-            <a:ext cx="701799" cy="276225"/>
+            <a:off x="8755320" y="917138"/>
+            <a:ext cx="693480" cy="274320"/>
           </a:xfrm>
           <a:prstGeom prst="rect">
             <a:avLst/>
@@ -7053,7 +7277,11 @@
           </a:bodyPr>
           <a:lstStyle/>
           <a:p>
-            <a:pPr algn="r"/>
+            <a:pPr algn="r">
+              <a:lnSpc>
+                <a:spcPts val="2160"/>
+              </a:lnSpc>
+            </a:pPr>
             <a:r>
               <a:rPr sz="1800" b="0" spc="-18">
                 <a:solidFill>
@@ -7076,8 +7304,8 @@
         </p:nvSpPr>
         <p:spPr>
           <a:xfrm>
-            <a:off x="838200" y="1457325"/>
-            <a:ext cx="9448800" cy="1573411"/>
+            <a:off x="838200" y="1477208"/>
+            <a:ext cx="9448800" cy="1546741"/>
           </a:xfrm>
           <a:prstGeom prst="rect">
             <a:avLst/>
@@ -7135,7 +7363,7 @@
         </p:nvSpPr>
         <p:spPr>
           <a:xfrm>
-            <a:off x="838200" y="3480197"/>
+            <a:off x="838200" y="3481983"/>
             <a:ext cx="8610600" cy="5134421"/>
           </a:xfrm>
           <a:prstGeom prst="roundRect">
@@ -7181,7 +7409,7 @@
         </p:nvSpPr>
         <p:spPr>
           <a:xfrm>
-            <a:off x="1057275" y="3699272"/>
+            <a:off x="1057275" y="3701058"/>
             <a:ext cx="114300" cy="114300"/>
           </a:xfrm>
           <a:prstGeom prst="ellipse">
@@ -7223,7 +7451,7 @@
         </p:nvSpPr>
         <p:spPr>
           <a:xfrm>
-            <a:off x="1247775" y="3699272"/>
+            <a:off x="1247775" y="3701058"/>
             <a:ext cx="114300" cy="114300"/>
           </a:xfrm>
           <a:prstGeom prst="ellipse">
@@ -7265,7 +7493,7 @@
         </p:nvSpPr>
         <p:spPr>
           <a:xfrm>
-            <a:off x="1438275" y="3699272"/>
+            <a:off x="1438275" y="3701058"/>
             <a:ext cx="114300" cy="114300"/>
           </a:xfrm>
           <a:prstGeom prst="ellipse">
@@ -7315,7 +7543,7 @@
         </p:blipFill>
         <p:spPr>
           <a:xfrm>
-            <a:off x="1057275" y="3965972"/>
+            <a:off x="1057275" y="3967758"/>
             <a:ext cx="8172450" cy="4429571"/>
           </a:xfrm>
           <a:prstGeom prst="rect">
@@ -7331,8 +7559,8 @@
         </p:nvSpPr>
         <p:spPr>
           <a:xfrm>
-            <a:off x="838200" y="8747968"/>
-            <a:ext cx="4337782" cy="238125"/>
+            <a:off x="838200" y="8744039"/>
+            <a:ext cx="4588929" cy="240030"/>
           </a:xfrm>
           <a:prstGeom prst="rect">
             <a:avLst/>
@@ -7345,7 +7573,11 @@
           </a:bodyPr>
           <a:lstStyle/>
           <a:p>
-            <a:pPr algn="l"/>
+            <a:pPr algn="l">
+              <a:lnSpc>
+                <a:spcPts val="1889"/>
+              </a:lnSpc>
+            </a:pPr>
             <a:r>
               <a:rPr sz="1575" b="0">
                 <a:solidFill>
@@ -7368,8 +7600,8 @@
         </p:nvSpPr>
         <p:spPr>
           <a:xfrm>
-            <a:off x="838200" y="9348043"/>
-            <a:ext cx="7503170" cy="761405"/>
+            <a:off x="838200" y="9308991"/>
+            <a:ext cx="8050299" cy="856178"/>
           </a:xfrm>
           <a:prstGeom prst="rect">
             <a:avLst/>
@@ -7427,7 +7659,7 @@
         </p:nvSpPr>
         <p:spPr>
           <a:xfrm>
-            <a:off x="838200" y="10547003"/>
+            <a:off x="838200" y="10550575"/>
             <a:ext cx="8610600" cy="1181100"/>
           </a:xfrm>
           <a:prstGeom prst="roundRect">
@@ -7471,8 +7703,8 @@
         </p:nvSpPr>
         <p:spPr>
           <a:xfrm>
-            <a:off x="1219200" y="10932765"/>
-            <a:ext cx="5315024" cy="409575"/>
+            <a:off x="1219200" y="10929729"/>
+            <a:ext cx="5615099" cy="411480"/>
           </a:xfrm>
           <a:prstGeom prst="rect">
             <a:avLst/>
@@ -7485,7 +7717,11 @@
           </a:bodyPr>
           <a:lstStyle/>
           <a:p>
-            <a:pPr algn="l"/>
+            <a:pPr algn="l">
+              <a:lnSpc>
+                <a:spcPts val="3240"/>
+              </a:lnSpc>
+            </a:pPr>
             <a:r>
               <a:rPr sz="2700" b="1" spc="-81">
                 <a:solidFill>
@@ -7508,7 +7744,7 @@
         </p:nvSpPr>
         <p:spPr>
           <a:xfrm>
-            <a:off x="8458200" y="10832753"/>
+            <a:off x="8458200" y="10836325"/>
             <a:ext cx="609600" cy="609600"/>
           </a:xfrm>
           <a:prstGeom prst="ellipse">
@@ -7550,7 +7786,7 @@
         </p:nvSpPr>
         <p:spPr>
           <a:xfrm>
-            <a:off x="8458200" y="10832753"/>
+            <a:off x="8458200" y="10836325"/>
             <a:ext cx="609600" cy="609600"/>
           </a:xfrm>
           <a:prstGeom prst="rect">
@@ -7564,7 +7800,11 @@
           </a:bodyPr>
           <a:lstStyle/>
           <a:p>
-            <a:pPr algn="ctr"/>
+            <a:pPr algn="ctr">
+              <a:lnSpc>
+                <a:spcPts val="2879"/>
+              </a:lnSpc>
+            </a:pPr>
             <a:r>
               <a:rPr sz="2400" b="1">
                 <a:solidFill>
@@ -7587,8 +7827,8 @@
         </p:nvSpPr>
         <p:spPr>
           <a:xfrm>
-            <a:off x="838200" y="11899553"/>
-            <a:ext cx="7263371" cy="219075"/>
+            <a:off x="838200" y="11894552"/>
+            <a:ext cx="7706506" cy="217170"/>
           </a:xfrm>
           <a:prstGeom prst="rect">
             <a:avLst/>
@@ -7601,7 +7841,11 @@
           </a:bodyPr>
           <a:lstStyle/>
           <a:p>
-            <a:pPr algn="l"/>
+            <a:pPr algn="l">
+              <a:lnSpc>
+                <a:spcPts val="1710"/>
+              </a:lnSpc>
+            </a:pPr>
             <a:r>
               <a:rPr sz="1425" b="0">
                 <a:solidFill>

--- a/service/marketing-studio/samples/tips-v1/canva/TIPS_캐러셀_5p.pptx
+++ b/service/marketing-studio/samples/tips-v1/canva/TIPS_캐러셀_5p.pptx
@@ -3215,7 +3215,7 @@
             <a:r>
               <a:rPr sz="1800" b="0" spc="-18">
                 <a:solidFill>
-                  <a:srgbClr val="FFFFFF"/>
+                  <a:srgbClr val="969CA8"/>
                 </a:solidFill>
                 <a:latin typeface="Noto Sans KR"/>
                 <a:ea typeface="Noto Sans KR"/>
@@ -3799,7 +3799,7 @@
             <a:r>
               <a:rPr sz="1800" b="0" spc="-18">
                 <a:solidFill>
-                  <a:srgbClr val="0F1A2E"/>
+                  <a:srgbClr val="767D89"/>
                 </a:solidFill>
                 <a:latin typeface="Noto Sans KR"/>
                 <a:ea typeface="Noto Sans KR"/>
@@ -3961,7 +3961,7 @@
             <a:r>
               <a:rPr sz="1800" b="1">
                 <a:solidFill>
-                  <a:srgbClr val="FFFFFF"/>
+                  <a:srgbClr val="B9BDC5"/>
                 </a:solidFill>
                 <a:latin typeface="Noto Sans KR"/>
                 <a:ea typeface="Noto Sans KR"/>
@@ -4043,7 +4043,7 @@
             <a:r>
               <a:rPr sz="2025" b="0">
                 <a:solidFill>
-                  <a:srgbClr val="FFFFFF"/>
+                  <a:srgbClr val="CCCFD4"/>
                 </a:solidFill>
                 <a:latin typeface="Noto Sans KR"/>
                 <a:ea typeface="Noto Sans KR"/>
@@ -4210,7 +4210,7 @@
             <a:r>
               <a:rPr sz="2025" b="1">
                 <a:solidFill>
-                  <a:srgbClr val="16243D"/>
+                  <a:srgbClr val="193E51"/>
                 </a:solidFill>
                 <a:latin typeface="Noto Sans KR"/>
                 <a:ea typeface="Noto Sans KR"/>
@@ -4336,7 +4336,7 @@
             <a:r>
               <a:rPr sz="1800" b="1">
                 <a:solidFill>
-                  <a:srgbClr val="FFFFFF"/>
+                  <a:srgbClr val="B9BDC5"/>
                 </a:solidFill>
                 <a:latin typeface="Noto Sans KR"/>
                 <a:ea typeface="Noto Sans KR"/>
@@ -4418,7 +4418,7 @@
             <a:r>
               <a:rPr sz="2025" b="0">
                 <a:solidFill>
-                  <a:srgbClr val="FFFFFF"/>
+                  <a:srgbClr val="CCCFD4"/>
                 </a:solidFill>
                 <a:latin typeface="Noto Sans KR"/>
                 <a:ea typeface="Noto Sans KR"/>
@@ -4527,7 +4527,7 @@
             <a:r>
               <a:rPr sz="1650" b="0">
                 <a:solidFill>
-                  <a:srgbClr val="0F1A2E"/>
+                  <a:srgbClr val="767D89"/>
                 </a:solidFill>
                 <a:latin typeface="Noto Sans KR"/>
                 <a:ea typeface="Noto Sans KR"/>
@@ -4635,7 +4635,7 @@
             <a:r>
               <a:rPr sz="1800" b="0" spc="-18">
                 <a:solidFill>
-                  <a:srgbClr val="0F1A2E"/>
+                  <a:srgbClr val="7B818C"/>
                 </a:solidFill>
                 <a:latin typeface="Noto Sans KR"/>
                 <a:ea typeface="Noto Sans KR"/>
@@ -5280,7 +5280,7 @@
             <a:r>
               <a:rPr sz="1950" b="0">
                 <a:solidFill>
-                  <a:srgbClr val="16243D"/>
+                  <a:srgbClr val="1B4757"/>
                 </a:solidFill>
                 <a:latin typeface="Noto Sans KR"/>
                 <a:ea typeface="Noto Sans KR"/>
@@ -5598,7 +5598,7 @@
             <a:r>
               <a:rPr sz="1650" b="0">
                 <a:solidFill>
-                  <a:srgbClr val="0F1A2E"/>
+                  <a:srgbClr val="7B818C"/>
                 </a:solidFill>
                 <a:latin typeface="Noto Sans KR"/>
                 <a:ea typeface="Noto Sans KR"/>
@@ -5706,7 +5706,7 @@
             <a:r>
               <a:rPr sz="1800" b="0" spc="-18">
                 <a:solidFill>
-                  <a:srgbClr val="FFFFFF"/>
+                  <a:srgbClr val="969CA8"/>
                 </a:solidFill>
                 <a:latin typeface="Noto Sans KR"/>
                 <a:ea typeface="Noto Sans KR"/>
@@ -7285,7 +7285,7 @@
             <a:r>
               <a:rPr sz="1800" b="0" spc="-18">
                 <a:solidFill>
-                  <a:srgbClr val="0F1A2E"/>
+                  <a:srgbClr val="797E87"/>
                 </a:solidFill>
                 <a:latin typeface="Noto Sans KR"/>
                 <a:ea typeface="Noto Sans KR"/>
